--- a/Experiencia de Aprendizaje 1 - Fundamentos de AI Generativa y Prompt Engineering/Clase 1.3/Clase 1.3.pptx
+++ b/Experiencia de Aprendizaje 1 - Fundamentos de AI Generativa y Prompt Engineering/Clase 1.3/Clase 1.3.pptx
@@ -12830,15 +12830,7 @@
             </a:r>
             <a:r>
               <a:rPr lang="es-MX" sz="3600" i="1" dirty="0"/>
-              <a:t>, errores, llamadas a las Tools, vector </a:t>
-            </a:r>
-            <a:r>
-              <a:rPr lang="es-MX" sz="3600" i="1" dirty="0" err="1"/>
-              <a:t>databases</a:t>
-            </a:r>
-            <a:r>
-              <a:rPr lang="es-MX" sz="3600" i="1" dirty="0"/>
-              <a:t> , etc.</a:t>
+              <a:t>, errores, llamadas a las Tools ... etc.</a:t>
             </a:r>
             <a:endParaRPr lang="es-CL" sz="3600" i="1" dirty="0"/>
           </a:p>

--- a/Experiencia de Aprendizaje 1 - Fundamentos de AI Generativa y Prompt Engineering/Clase 1.3/Clase 1.3.pptx
+++ b/Experiencia de Aprendizaje 1 - Fundamentos de AI Generativa y Prompt Engineering/Clase 1.3/Clase 1.3.pptx
@@ -5,7 +5,7 @@
     <p:sldMasterId id="2147483648" r:id="rId1"/>
   </p:sldMasterIdLst>
   <p:notesMasterIdLst>
-    <p:notesMasterId r:id="rId26"/>
+    <p:notesMasterId r:id="rId31"/>
   </p:notesMasterIdLst>
   <p:sldIdLst>
     <p:sldId id="256" r:id="rId2"/>
@@ -26,12 +26,17 @@
     <p:sldId id="286" r:id="rId17"/>
     <p:sldId id="288" r:id="rId18"/>
     <p:sldId id="287" r:id="rId19"/>
-    <p:sldId id="289" r:id="rId20"/>
-    <p:sldId id="290" r:id="rId21"/>
-    <p:sldId id="291" r:id="rId22"/>
-    <p:sldId id="292" r:id="rId23"/>
-    <p:sldId id="293" r:id="rId24"/>
-    <p:sldId id="294" r:id="rId25"/>
+    <p:sldId id="297" r:id="rId20"/>
+    <p:sldId id="298" r:id="rId21"/>
+    <p:sldId id="299" r:id="rId22"/>
+    <p:sldId id="300" r:id="rId23"/>
+    <p:sldId id="301" r:id="rId24"/>
+    <p:sldId id="289" r:id="rId25"/>
+    <p:sldId id="290" r:id="rId26"/>
+    <p:sldId id="291" r:id="rId27"/>
+    <p:sldId id="292" r:id="rId28"/>
+    <p:sldId id="293" r:id="rId29"/>
+    <p:sldId id="294" r:id="rId30"/>
   </p:sldIdLst>
   <p:sldSz cx="12192000" cy="6858000"/>
   <p:notesSz cx="6858000" cy="9144000"/>
@@ -232,7 +237,7 @@
           <a:p>
             <a:fld id="{87BDCB0C-69E9-4911-980B-989A824EA717}" type="datetimeFigureOut">
               <a:rPr lang="es-CL" smtClean="0"/>
-              <a:t>23-03-2026</a:t>
+              <a:t>24-08-2026</a:t>
             </a:fld>
             <a:endParaRPr lang="es-CL"/>
           </a:p>
@@ -1132,7 +1137,7 @@
         <p:cNvPr id="1" name="">
           <a:extLst>
             <a:ext uri="{FF2B5EF4-FFF2-40B4-BE49-F238E27FC236}">
-              <a16:creationId xmlns:a16="http://schemas.microsoft.com/office/drawing/2014/main" id="{FA7D2A26-30DF-F308-3285-F059ACEF83B8}"/>
+              <a16:creationId xmlns:a16="http://schemas.microsoft.com/office/drawing/2014/main" id="{2058D269-0AB0-67B6-3A23-14ECD5602197}"/>
             </a:ext>
           </a:extLst>
         </p:cNvPr>
@@ -1152,7 +1157,7 @@
           <p:cNvPr id="2" name="Marcador de imagen de diapositiva 1">
             <a:extLst>
               <a:ext uri="{FF2B5EF4-FFF2-40B4-BE49-F238E27FC236}">
-                <a16:creationId xmlns:a16="http://schemas.microsoft.com/office/drawing/2014/main" id="{875DF00B-7E4E-8BD7-22CA-6D666C6F0A55}"/>
+                <a16:creationId xmlns:a16="http://schemas.microsoft.com/office/drawing/2014/main" id="{C0B348FC-FCA9-CFA7-354A-72A0D35C700D}"/>
               </a:ext>
             </a:extLst>
           </p:cNvPr>
@@ -1170,7 +1175,7 @@
           <p:cNvPr id="3" name="Marcador de notas 2">
             <a:extLst>
               <a:ext uri="{FF2B5EF4-FFF2-40B4-BE49-F238E27FC236}">
-                <a16:creationId xmlns:a16="http://schemas.microsoft.com/office/drawing/2014/main" id="{8F35B1E3-A8B8-6A52-6B31-D722ED8FB00B}"/>
+                <a16:creationId xmlns:a16="http://schemas.microsoft.com/office/drawing/2014/main" id="{C0FDA374-4535-4E0B-A1E6-27E21CEFDE2F}"/>
               </a:ext>
             </a:extLst>
           </p:cNvPr>
@@ -1195,7 +1200,7 @@
           <p:cNvPr id="4" name="Marcador de número de diapositiva 3">
             <a:extLst>
               <a:ext uri="{FF2B5EF4-FFF2-40B4-BE49-F238E27FC236}">
-                <a16:creationId xmlns:a16="http://schemas.microsoft.com/office/drawing/2014/main" id="{13933A10-AC49-7220-0F9A-18F6767C26AA}"/>
+                <a16:creationId xmlns:a16="http://schemas.microsoft.com/office/drawing/2014/main" id="{140AC34A-E673-319A-0D16-11DEC84B2996}"/>
               </a:ext>
             </a:extLst>
           </p:cNvPr>
@@ -1222,7 +1227,7 @@
     </p:spTree>
     <p:extLst>
       <p:ext uri="{BB962C8B-B14F-4D97-AF65-F5344CB8AC3E}">
-        <p14:creationId xmlns:p14="http://schemas.microsoft.com/office/powerpoint/2010/main" val="3031360633"/>
+        <p14:creationId xmlns:p14="http://schemas.microsoft.com/office/powerpoint/2010/main" val="2455579004"/>
       </p:ext>
     </p:extLst>
   </p:cSld>
@@ -1240,7 +1245,7 @@
         <p:cNvPr id="1" name="">
           <a:extLst>
             <a:ext uri="{FF2B5EF4-FFF2-40B4-BE49-F238E27FC236}">
-              <a16:creationId xmlns:a16="http://schemas.microsoft.com/office/drawing/2014/main" id="{8D4C6A3E-6638-B463-91BA-F990C5ED9A93}"/>
+              <a16:creationId xmlns:a16="http://schemas.microsoft.com/office/drawing/2014/main" id="{ED59845F-3040-0B5A-8505-9492475C9E9B}"/>
             </a:ext>
           </a:extLst>
         </p:cNvPr>
@@ -1260,7 +1265,7 @@
           <p:cNvPr id="2" name="Marcador de imagen de diapositiva 1">
             <a:extLst>
               <a:ext uri="{FF2B5EF4-FFF2-40B4-BE49-F238E27FC236}">
-                <a16:creationId xmlns:a16="http://schemas.microsoft.com/office/drawing/2014/main" id="{F5E71565-4403-9286-E3B4-E928CCC3867C}"/>
+                <a16:creationId xmlns:a16="http://schemas.microsoft.com/office/drawing/2014/main" id="{D047F636-C474-0D32-9626-0D922CB4F511}"/>
               </a:ext>
             </a:extLst>
           </p:cNvPr>
@@ -1278,7 +1283,7 @@
           <p:cNvPr id="3" name="Marcador de notas 2">
             <a:extLst>
               <a:ext uri="{FF2B5EF4-FFF2-40B4-BE49-F238E27FC236}">
-                <a16:creationId xmlns:a16="http://schemas.microsoft.com/office/drawing/2014/main" id="{3336BEFF-A0CD-9054-34E3-F4F14F54B0A7}"/>
+                <a16:creationId xmlns:a16="http://schemas.microsoft.com/office/drawing/2014/main" id="{D7EB764C-EAD8-513C-1542-C4D09EDAB4DE}"/>
               </a:ext>
             </a:extLst>
           </p:cNvPr>
@@ -1303,7 +1308,7 @@
           <p:cNvPr id="4" name="Marcador de número de diapositiva 3">
             <a:extLst>
               <a:ext uri="{FF2B5EF4-FFF2-40B4-BE49-F238E27FC236}">
-                <a16:creationId xmlns:a16="http://schemas.microsoft.com/office/drawing/2014/main" id="{D7C42786-B01A-48F5-1F9F-1FF580257E89}"/>
+                <a16:creationId xmlns:a16="http://schemas.microsoft.com/office/drawing/2014/main" id="{1F1DD901-DA42-013B-A398-41EC43AE0622}"/>
               </a:ext>
             </a:extLst>
           </p:cNvPr>
@@ -1330,7 +1335,7 @@
     </p:spTree>
     <p:extLst>
       <p:ext uri="{BB962C8B-B14F-4D97-AF65-F5344CB8AC3E}">
-        <p14:creationId xmlns:p14="http://schemas.microsoft.com/office/powerpoint/2010/main" val="3253126213"/>
+        <p14:creationId xmlns:p14="http://schemas.microsoft.com/office/powerpoint/2010/main" val="1926278525"/>
       </p:ext>
     </p:extLst>
   </p:cSld>
@@ -1348,7 +1353,7 @@
         <p:cNvPr id="1" name="">
           <a:extLst>
             <a:ext uri="{FF2B5EF4-FFF2-40B4-BE49-F238E27FC236}">
-              <a16:creationId xmlns:a16="http://schemas.microsoft.com/office/drawing/2014/main" id="{77708777-49AC-EF6D-1468-E5C290178306}"/>
+              <a16:creationId xmlns:a16="http://schemas.microsoft.com/office/drawing/2014/main" id="{74DE25CE-210B-3EA7-9E77-6C37A3916FDE}"/>
             </a:ext>
           </a:extLst>
         </p:cNvPr>
@@ -1368,7 +1373,7 @@
           <p:cNvPr id="2" name="Marcador de imagen de diapositiva 1">
             <a:extLst>
               <a:ext uri="{FF2B5EF4-FFF2-40B4-BE49-F238E27FC236}">
-                <a16:creationId xmlns:a16="http://schemas.microsoft.com/office/drawing/2014/main" id="{6A6F50F4-FD45-4CE4-8390-0C48611F89DE}"/>
+                <a16:creationId xmlns:a16="http://schemas.microsoft.com/office/drawing/2014/main" id="{5E43B0CB-6FDA-E8EA-05B3-6F58DAECDF1D}"/>
               </a:ext>
             </a:extLst>
           </p:cNvPr>
@@ -1386,7 +1391,7 @@
           <p:cNvPr id="3" name="Marcador de notas 2">
             <a:extLst>
               <a:ext uri="{FF2B5EF4-FFF2-40B4-BE49-F238E27FC236}">
-                <a16:creationId xmlns:a16="http://schemas.microsoft.com/office/drawing/2014/main" id="{D0A70549-6B88-DE67-84E1-B426A7F2FAA3}"/>
+                <a16:creationId xmlns:a16="http://schemas.microsoft.com/office/drawing/2014/main" id="{3D24787D-7D49-4A2B-D255-CFF1B1F148D5}"/>
               </a:ext>
             </a:extLst>
           </p:cNvPr>
@@ -1411,7 +1416,7 @@
           <p:cNvPr id="4" name="Marcador de número de diapositiva 3">
             <a:extLst>
               <a:ext uri="{FF2B5EF4-FFF2-40B4-BE49-F238E27FC236}">
-                <a16:creationId xmlns:a16="http://schemas.microsoft.com/office/drawing/2014/main" id="{B82F6C2E-6BE1-AD55-0F5D-119626FF39BC}"/>
+                <a16:creationId xmlns:a16="http://schemas.microsoft.com/office/drawing/2014/main" id="{C9C0AB57-9ADE-818D-97CF-65D06A613037}"/>
               </a:ext>
             </a:extLst>
           </p:cNvPr>
@@ -1438,7 +1443,7 @@
     </p:spTree>
     <p:extLst>
       <p:ext uri="{BB962C8B-B14F-4D97-AF65-F5344CB8AC3E}">
-        <p14:creationId xmlns:p14="http://schemas.microsoft.com/office/powerpoint/2010/main" val="1669926810"/>
+        <p14:creationId xmlns:p14="http://schemas.microsoft.com/office/powerpoint/2010/main" val="2869145538"/>
       </p:ext>
     </p:extLst>
   </p:cSld>
@@ -1456,7 +1461,7 @@
         <p:cNvPr id="1" name="">
           <a:extLst>
             <a:ext uri="{FF2B5EF4-FFF2-40B4-BE49-F238E27FC236}">
-              <a16:creationId xmlns:a16="http://schemas.microsoft.com/office/drawing/2014/main" id="{C9A3C97F-886B-B3F6-BE8F-26BA2D2A51A5}"/>
+              <a16:creationId xmlns:a16="http://schemas.microsoft.com/office/drawing/2014/main" id="{0EB0488E-D9B5-E4A3-AFCE-7F956A657F9E}"/>
             </a:ext>
           </a:extLst>
         </p:cNvPr>
@@ -1476,7 +1481,7 @@
           <p:cNvPr id="2" name="Marcador de imagen de diapositiva 1">
             <a:extLst>
               <a:ext uri="{FF2B5EF4-FFF2-40B4-BE49-F238E27FC236}">
-                <a16:creationId xmlns:a16="http://schemas.microsoft.com/office/drawing/2014/main" id="{3A371849-EDA9-1B5E-0DBE-22B238FA7B9E}"/>
+                <a16:creationId xmlns:a16="http://schemas.microsoft.com/office/drawing/2014/main" id="{2B6A869D-A839-4364-89D4-78D95AF9D69F}"/>
               </a:ext>
             </a:extLst>
           </p:cNvPr>
@@ -1494,7 +1499,7 @@
           <p:cNvPr id="3" name="Marcador de notas 2">
             <a:extLst>
               <a:ext uri="{FF2B5EF4-FFF2-40B4-BE49-F238E27FC236}">
-                <a16:creationId xmlns:a16="http://schemas.microsoft.com/office/drawing/2014/main" id="{615554C9-EA1C-236C-EBC1-8B4CB45644AD}"/>
+                <a16:creationId xmlns:a16="http://schemas.microsoft.com/office/drawing/2014/main" id="{73BE2981-69D5-177D-1FFE-11420E708FEA}"/>
               </a:ext>
             </a:extLst>
           </p:cNvPr>
@@ -1519,7 +1524,7 @@
           <p:cNvPr id="4" name="Marcador de número de diapositiva 3">
             <a:extLst>
               <a:ext uri="{FF2B5EF4-FFF2-40B4-BE49-F238E27FC236}">
-                <a16:creationId xmlns:a16="http://schemas.microsoft.com/office/drawing/2014/main" id="{CDC23E72-2895-5A38-B2C6-975976D1F828}"/>
+                <a16:creationId xmlns:a16="http://schemas.microsoft.com/office/drawing/2014/main" id="{5C5D735E-B2CA-F60D-C73C-5606F7B5467A}"/>
               </a:ext>
             </a:extLst>
           </p:cNvPr>
@@ -1546,7 +1551,7 @@
     </p:spTree>
     <p:extLst>
       <p:ext uri="{BB962C8B-B14F-4D97-AF65-F5344CB8AC3E}">
-        <p14:creationId xmlns:p14="http://schemas.microsoft.com/office/powerpoint/2010/main" val="3424588303"/>
+        <p14:creationId xmlns:p14="http://schemas.microsoft.com/office/powerpoint/2010/main" val="781401532"/>
       </p:ext>
     </p:extLst>
   </p:cSld>
@@ -1564,7 +1569,7 @@
         <p:cNvPr id="1" name="">
           <a:extLst>
             <a:ext uri="{FF2B5EF4-FFF2-40B4-BE49-F238E27FC236}">
-              <a16:creationId xmlns:a16="http://schemas.microsoft.com/office/drawing/2014/main" id="{5964B4B3-4EDE-EF5C-D9F6-24C60EC95423}"/>
+              <a16:creationId xmlns:a16="http://schemas.microsoft.com/office/drawing/2014/main" id="{E2CC27AB-6E1A-FF43-235D-3D33B70119D5}"/>
             </a:ext>
           </a:extLst>
         </p:cNvPr>
@@ -1584,7 +1589,7 @@
           <p:cNvPr id="2" name="Marcador de imagen de diapositiva 1">
             <a:extLst>
               <a:ext uri="{FF2B5EF4-FFF2-40B4-BE49-F238E27FC236}">
-                <a16:creationId xmlns:a16="http://schemas.microsoft.com/office/drawing/2014/main" id="{529FD7A6-34F5-4B7E-A34E-AD1712E551AB}"/>
+                <a16:creationId xmlns:a16="http://schemas.microsoft.com/office/drawing/2014/main" id="{4A3554DD-97C2-65CB-DD4E-AEBC214A37A0}"/>
               </a:ext>
             </a:extLst>
           </p:cNvPr>
@@ -1602,7 +1607,7 @@
           <p:cNvPr id="3" name="Marcador de notas 2">
             <a:extLst>
               <a:ext uri="{FF2B5EF4-FFF2-40B4-BE49-F238E27FC236}">
-                <a16:creationId xmlns:a16="http://schemas.microsoft.com/office/drawing/2014/main" id="{BEC6058E-D48B-6CBA-A12A-8D4BDE78C5DA}"/>
+                <a16:creationId xmlns:a16="http://schemas.microsoft.com/office/drawing/2014/main" id="{5088EFFA-C4DB-B36F-AD71-186D26C21616}"/>
               </a:ext>
             </a:extLst>
           </p:cNvPr>
@@ -1627,7 +1632,7 @@
           <p:cNvPr id="4" name="Marcador de número de diapositiva 3">
             <a:extLst>
               <a:ext uri="{FF2B5EF4-FFF2-40B4-BE49-F238E27FC236}">
-                <a16:creationId xmlns:a16="http://schemas.microsoft.com/office/drawing/2014/main" id="{92C0BE07-093E-CEB1-387C-6F2CB27EC61C}"/>
+                <a16:creationId xmlns:a16="http://schemas.microsoft.com/office/drawing/2014/main" id="{91437267-5E49-C370-279D-A714FD13D492}"/>
               </a:ext>
             </a:extLst>
           </p:cNvPr>
@@ -1654,7 +1659,7 @@
     </p:spTree>
     <p:extLst>
       <p:ext uri="{BB962C8B-B14F-4D97-AF65-F5344CB8AC3E}">
-        <p14:creationId xmlns:p14="http://schemas.microsoft.com/office/powerpoint/2010/main" val="2908301346"/>
+        <p14:creationId xmlns:p14="http://schemas.microsoft.com/office/powerpoint/2010/main" val="2958139379"/>
       </p:ext>
     </p:extLst>
   </p:cSld>
@@ -1780,6 +1785,546 @@
         <p:cNvPr id="1" name="">
           <a:extLst>
             <a:ext uri="{FF2B5EF4-FFF2-40B4-BE49-F238E27FC236}">
+              <a16:creationId xmlns:a16="http://schemas.microsoft.com/office/drawing/2014/main" id="{FA7D2A26-30DF-F308-3285-F059ACEF83B8}"/>
+            </a:ext>
+          </a:extLst>
+        </p:cNvPr>
+        <p:cNvGrpSpPr/>
+        <p:nvPr/>
+      </p:nvGrpSpPr>
+      <p:grpSpPr>
+        <a:xfrm>
+          <a:off x="0" y="0"/>
+          <a:ext cx="0" cy="0"/>
+          <a:chOff x="0" y="0"/>
+          <a:chExt cx="0" cy="0"/>
+        </a:xfrm>
+      </p:grpSpPr>
+      <p:sp>
+        <p:nvSpPr>
+          <p:cNvPr id="2" name="Marcador de imagen de diapositiva 1">
+            <a:extLst>
+              <a:ext uri="{FF2B5EF4-FFF2-40B4-BE49-F238E27FC236}">
+                <a16:creationId xmlns:a16="http://schemas.microsoft.com/office/drawing/2014/main" id="{875DF00B-7E4E-8BD7-22CA-6D666C6F0A55}"/>
+              </a:ext>
+            </a:extLst>
+          </p:cNvPr>
+          <p:cNvSpPr>
+            <a:spLocks noGrp="1" noRot="1" noChangeAspect="1"/>
+          </p:cNvSpPr>
+          <p:nvPr>
+            <p:ph type="sldImg"/>
+          </p:nvPr>
+        </p:nvSpPr>
+        <p:spPr/>
+      </p:sp>
+      <p:sp>
+        <p:nvSpPr>
+          <p:cNvPr id="3" name="Marcador de notas 2">
+            <a:extLst>
+              <a:ext uri="{FF2B5EF4-FFF2-40B4-BE49-F238E27FC236}">
+                <a16:creationId xmlns:a16="http://schemas.microsoft.com/office/drawing/2014/main" id="{8F35B1E3-A8B8-6A52-6B31-D722ED8FB00B}"/>
+              </a:ext>
+            </a:extLst>
+          </p:cNvPr>
+          <p:cNvSpPr>
+            <a:spLocks noGrp="1"/>
+          </p:cNvSpPr>
+          <p:nvPr>
+            <p:ph type="body" idx="1"/>
+          </p:nvPr>
+        </p:nvSpPr>
+        <p:spPr/>
+        <p:txBody>
+          <a:bodyPr/>
+          <a:lstStyle/>
+          <a:p>
+            <a:endParaRPr lang="es-CL" dirty="0"/>
+          </a:p>
+        </p:txBody>
+      </p:sp>
+      <p:sp>
+        <p:nvSpPr>
+          <p:cNvPr id="4" name="Marcador de número de diapositiva 3">
+            <a:extLst>
+              <a:ext uri="{FF2B5EF4-FFF2-40B4-BE49-F238E27FC236}">
+                <a16:creationId xmlns:a16="http://schemas.microsoft.com/office/drawing/2014/main" id="{13933A10-AC49-7220-0F9A-18F6767C26AA}"/>
+              </a:ext>
+            </a:extLst>
+          </p:cNvPr>
+          <p:cNvSpPr>
+            <a:spLocks noGrp="1"/>
+          </p:cNvSpPr>
+          <p:nvPr>
+            <p:ph type="sldNum" sz="quarter" idx="5"/>
+          </p:nvPr>
+        </p:nvSpPr>
+        <p:spPr/>
+        <p:txBody>
+          <a:bodyPr/>
+          <a:lstStyle/>
+          <a:p>
+            <a:fld id="{2107F482-7FF7-4DD4-AE91-ACA70D5B43D5}" type="slidenum">
+              <a:rPr lang="es-CL" smtClean="0"/>
+              <a:t>24</a:t>
+            </a:fld>
+            <a:endParaRPr lang="es-CL"/>
+          </a:p>
+        </p:txBody>
+      </p:sp>
+    </p:spTree>
+    <p:extLst>
+      <p:ext uri="{BB962C8B-B14F-4D97-AF65-F5344CB8AC3E}">
+        <p14:creationId xmlns:p14="http://schemas.microsoft.com/office/powerpoint/2010/main" val="3031360633"/>
+      </p:ext>
+    </p:extLst>
+  </p:cSld>
+  <p:clrMapOvr>
+    <a:masterClrMapping/>
+  </p:clrMapOvr>
+</p:notes>
+</file>
+
+<file path=ppt/notesSlides/notesSlide21.xml><?xml version="1.0" encoding="utf-8"?>
+<p:notes xmlns:a="http://schemas.openxmlformats.org/drawingml/2006/main" xmlns:r="http://schemas.openxmlformats.org/officeDocument/2006/relationships" xmlns:p="http://schemas.openxmlformats.org/presentationml/2006/main">
+  <p:cSld>
+    <p:spTree>
+      <p:nvGrpSpPr>
+        <p:cNvPr id="1" name="">
+          <a:extLst>
+            <a:ext uri="{FF2B5EF4-FFF2-40B4-BE49-F238E27FC236}">
+              <a16:creationId xmlns:a16="http://schemas.microsoft.com/office/drawing/2014/main" id="{8D4C6A3E-6638-B463-91BA-F990C5ED9A93}"/>
+            </a:ext>
+          </a:extLst>
+        </p:cNvPr>
+        <p:cNvGrpSpPr/>
+        <p:nvPr/>
+      </p:nvGrpSpPr>
+      <p:grpSpPr>
+        <a:xfrm>
+          <a:off x="0" y="0"/>
+          <a:ext cx="0" cy="0"/>
+          <a:chOff x="0" y="0"/>
+          <a:chExt cx="0" cy="0"/>
+        </a:xfrm>
+      </p:grpSpPr>
+      <p:sp>
+        <p:nvSpPr>
+          <p:cNvPr id="2" name="Marcador de imagen de diapositiva 1">
+            <a:extLst>
+              <a:ext uri="{FF2B5EF4-FFF2-40B4-BE49-F238E27FC236}">
+                <a16:creationId xmlns:a16="http://schemas.microsoft.com/office/drawing/2014/main" id="{F5E71565-4403-9286-E3B4-E928CCC3867C}"/>
+              </a:ext>
+            </a:extLst>
+          </p:cNvPr>
+          <p:cNvSpPr>
+            <a:spLocks noGrp="1" noRot="1" noChangeAspect="1"/>
+          </p:cNvSpPr>
+          <p:nvPr>
+            <p:ph type="sldImg"/>
+          </p:nvPr>
+        </p:nvSpPr>
+        <p:spPr/>
+      </p:sp>
+      <p:sp>
+        <p:nvSpPr>
+          <p:cNvPr id="3" name="Marcador de notas 2">
+            <a:extLst>
+              <a:ext uri="{FF2B5EF4-FFF2-40B4-BE49-F238E27FC236}">
+                <a16:creationId xmlns:a16="http://schemas.microsoft.com/office/drawing/2014/main" id="{3336BEFF-A0CD-9054-34E3-F4F14F54B0A7}"/>
+              </a:ext>
+            </a:extLst>
+          </p:cNvPr>
+          <p:cNvSpPr>
+            <a:spLocks noGrp="1"/>
+          </p:cNvSpPr>
+          <p:nvPr>
+            <p:ph type="body" idx="1"/>
+          </p:nvPr>
+        </p:nvSpPr>
+        <p:spPr/>
+        <p:txBody>
+          <a:bodyPr/>
+          <a:lstStyle/>
+          <a:p>
+            <a:endParaRPr lang="es-CL" dirty="0"/>
+          </a:p>
+        </p:txBody>
+      </p:sp>
+      <p:sp>
+        <p:nvSpPr>
+          <p:cNvPr id="4" name="Marcador de número de diapositiva 3">
+            <a:extLst>
+              <a:ext uri="{FF2B5EF4-FFF2-40B4-BE49-F238E27FC236}">
+                <a16:creationId xmlns:a16="http://schemas.microsoft.com/office/drawing/2014/main" id="{D7C42786-B01A-48F5-1F9F-1FF580257E89}"/>
+              </a:ext>
+            </a:extLst>
+          </p:cNvPr>
+          <p:cNvSpPr>
+            <a:spLocks noGrp="1"/>
+          </p:cNvSpPr>
+          <p:nvPr>
+            <p:ph type="sldNum" sz="quarter" idx="5"/>
+          </p:nvPr>
+        </p:nvSpPr>
+        <p:spPr/>
+        <p:txBody>
+          <a:bodyPr/>
+          <a:lstStyle/>
+          <a:p>
+            <a:fld id="{2107F482-7FF7-4DD4-AE91-ACA70D5B43D5}" type="slidenum">
+              <a:rPr lang="es-CL" smtClean="0"/>
+              <a:t>25</a:t>
+            </a:fld>
+            <a:endParaRPr lang="es-CL"/>
+          </a:p>
+        </p:txBody>
+      </p:sp>
+    </p:spTree>
+    <p:extLst>
+      <p:ext uri="{BB962C8B-B14F-4D97-AF65-F5344CB8AC3E}">
+        <p14:creationId xmlns:p14="http://schemas.microsoft.com/office/powerpoint/2010/main" val="3253126213"/>
+      </p:ext>
+    </p:extLst>
+  </p:cSld>
+  <p:clrMapOvr>
+    <a:masterClrMapping/>
+  </p:clrMapOvr>
+</p:notes>
+</file>
+
+<file path=ppt/notesSlides/notesSlide22.xml><?xml version="1.0" encoding="utf-8"?>
+<p:notes xmlns:a="http://schemas.openxmlformats.org/drawingml/2006/main" xmlns:r="http://schemas.openxmlformats.org/officeDocument/2006/relationships" xmlns:p="http://schemas.openxmlformats.org/presentationml/2006/main">
+  <p:cSld>
+    <p:spTree>
+      <p:nvGrpSpPr>
+        <p:cNvPr id="1" name="">
+          <a:extLst>
+            <a:ext uri="{FF2B5EF4-FFF2-40B4-BE49-F238E27FC236}">
+              <a16:creationId xmlns:a16="http://schemas.microsoft.com/office/drawing/2014/main" id="{77708777-49AC-EF6D-1468-E5C290178306}"/>
+            </a:ext>
+          </a:extLst>
+        </p:cNvPr>
+        <p:cNvGrpSpPr/>
+        <p:nvPr/>
+      </p:nvGrpSpPr>
+      <p:grpSpPr>
+        <a:xfrm>
+          <a:off x="0" y="0"/>
+          <a:ext cx="0" cy="0"/>
+          <a:chOff x="0" y="0"/>
+          <a:chExt cx="0" cy="0"/>
+        </a:xfrm>
+      </p:grpSpPr>
+      <p:sp>
+        <p:nvSpPr>
+          <p:cNvPr id="2" name="Marcador de imagen de diapositiva 1">
+            <a:extLst>
+              <a:ext uri="{FF2B5EF4-FFF2-40B4-BE49-F238E27FC236}">
+                <a16:creationId xmlns:a16="http://schemas.microsoft.com/office/drawing/2014/main" id="{6A6F50F4-FD45-4CE4-8390-0C48611F89DE}"/>
+              </a:ext>
+            </a:extLst>
+          </p:cNvPr>
+          <p:cNvSpPr>
+            <a:spLocks noGrp="1" noRot="1" noChangeAspect="1"/>
+          </p:cNvSpPr>
+          <p:nvPr>
+            <p:ph type="sldImg"/>
+          </p:nvPr>
+        </p:nvSpPr>
+        <p:spPr/>
+      </p:sp>
+      <p:sp>
+        <p:nvSpPr>
+          <p:cNvPr id="3" name="Marcador de notas 2">
+            <a:extLst>
+              <a:ext uri="{FF2B5EF4-FFF2-40B4-BE49-F238E27FC236}">
+                <a16:creationId xmlns:a16="http://schemas.microsoft.com/office/drawing/2014/main" id="{D0A70549-6B88-DE67-84E1-B426A7F2FAA3}"/>
+              </a:ext>
+            </a:extLst>
+          </p:cNvPr>
+          <p:cNvSpPr>
+            <a:spLocks noGrp="1"/>
+          </p:cNvSpPr>
+          <p:nvPr>
+            <p:ph type="body" idx="1"/>
+          </p:nvPr>
+        </p:nvSpPr>
+        <p:spPr/>
+        <p:txBody>
+          <a:bodyPr/>
+          <a:lstStyle/>
+          <a:p>
+            <a:endParaRPr lang="es-CL" dirty="0"/>
+          </a:p>
+        </p:txBody>
+      </p:sp>
+      <p:sp>
+        <p:nvSpPr>
+          <p:cNvPr id="4" name="Marcador de número de diapositiva 3">
+            <a:extLst>
+              <a:ext uri="{FF2B5EF4-FFF2-40B4-BE49-F238E27FC236}">
+                <a16:creationId xmlns:a16="http://schemas.microsoft.com/office/drawing/2014/main" id="{B82F6C2E-6BE1-AD55-0F5D-119626FF39BC}"/>
+              </a:ext>
+            </a:extLst>
+          </p:cNvPr>
+          <p:cNvSpPr>
+            <a:spLocks noGrp="1"/>
+          </p:cNvSpPr>
+          <p:nvPr>
+            <p:ph type="sldNum" sz="quarter" idx="5"/>
+          </p:nvPr>
+        </p:nvSpPr>
+        <p:spPr/>
+        <p:txBody>
+          <a:bodyPr/>
+          <a:lstStyle/>
+          <a:p>
+            <a:fld id="{2107F482-7FF7-4DD4-AE91-ACA70D5B43D5}" type="slidenum">
+              <a:rPr lang="es-CL" smtClean="0"/>
+              <a:t>26</a:t>
+            </a:fld>
+            <a:endParaRPr lang="es-CL"/>
+          </a:p>
+        </p:txBody>
+      </p:sp>
+    </p:spTree>
+    <p:extLst>
+      <p:ext uri="{BB962C8B-B14F-4D97-AF65-F5344CB8AC3E}">
+        <p14:creationId xmlns:p14="http://schemas.microsoft.com/office/powerpoint/2010/main" val="1669926810"/>
+      </p:ext>
+    </p:extLst>
+  </p:cSld>
+  <p:clrMapOvr>
+    <a:masterClrMapping/>
+  </p:clrMapOvr>
+</p:notes>
+</file>
+
+<file path=ppt/notesSlides/notesSlide23.xml><?xml version="1.0" encoding="utf-8"?>
+<p:notes xmlns:a="http://schemas.openxmlformats.org/drawingml/2006/main" xmlns:r="http://schemas.openxmlformats.org/officeDocument/2006/relationships" xmlns:p="http://schemas.openxmlformats.org/presentationml/2006/main">
+  <p:cSld>
+    <p:spTree>
+      <p:nvGrpSpPr>
+        <p:cNvPr id="1" name="">
+          <a:extLst>
+            <a:ext uri="{FF2B5EF4-FFF2-40B4-BE49-F238E27FC236}">
+              <a16:creationId xmlns:a16="http://schemas.microsoft.com/office/drawing/2014/main" id="{C9A3C97F-886B-B3F6-BE8F-26BA2D2A51A5}"/>
+            </a:ext>
+          </a:extLst>
+        </p:cNvPr>
+        <p:cNvGrpSpPr/>
+        <p:nvPr/>
+      </p:nvGrpSpPr>
+      <p:grpSpPr>
+        <a:xfrm>
+          <a:off x="0" y="0"/>
+          <a:ext cx="0" cy="0"/>
+          <a:chOff x="0" y="0"/>
+          <a:chExt cx="0" cy="0"/>
+        </a:xfrm>
+      </p:grpSpPr>
+      <p:sp>
+        <p:nvSpPr>
+          <p:cNvPr id="2" name="Marcador de imagen de diapositiva 1">
+            <a:extLst>
+              <a:ext uri="{FF2B5EF4-FFF2-40B4-BE49-F238E27FC236}">
+                <a16:creationId xmlns:a16="http://schemas.microsoft.com/office/drawing/2014/main" id="{3A371849-EDA9-1B5E-0DBE-22B238FA7B9E}"/>
+              </a:ext>
+            </a:extLst>
+          </p:cNvPr>
+          <p:cNvSpPr>
+            <a:spLocks noGrp="1" noRot="1" noChangeAspect="1"/>
+          </p:cNvSpPr>
+          <p:nvPr>
+            <p:ph type="sldImg"/>
+          </p:nvPr>
+        </p:nvSpPr>
+        <p:spPr/>
+      </p:sp>
+      <p:sp>
+        <p:nvSpPr>
+          <p:cNvPr id="3" name="Marcador de notas 2">
+            <a:extLst>
+              <a:ext uri="{FF2B5EF4-FFF2-40B4-BE49-F238E27FC236}">
+                <a16:creationId xmlns:a16="http://schemas.microsoft.com/office/drawing/2014/main" id="{615554C9-EA1C-236C-EBC1-8B4CB45644AD}"/>
+              </a:ext>
+            </a:extLst>
+          </p:cNvPr>
+          <p:cNvSpPr>
+            <a:spLocks noGrp="1"/>
+          </p:cNvSpPr>
+          <p:nvPr>
+            <p:ph type="body" idx="1"/>
+          </p:nvPr>
+        </p:nvSpPr>
+        <p:spPr/>
+        <p:txBody>
+          <a:bodyPr/>
+          <a:lstStyle/>
+          <a:p>
+            <a:endParaRPr lang="es-CL" dirty="0"/>
+          </a:p>
+        </p:txBody>
+      </p:sp>
+      <p:sp>
+        <p:nvSpPr>
+          <p:cNvPr id="4" name="Marcador de número de diapositiva 3">
+            <a:extLst>
+              <a:ext uri="{FF2B5EF4-FFF2-40B4-BE49-F238E27FC236}">
+                <a16:creationId xmlns:a16="http://schemas.microsoft.com/office/drawing/2014/main" id="{CDC23E72-2895-5A38-B2C6-975976D1F828}"/>
+              </a:ext>
+            </a:extLst>
+          </p:cNvPr>
+          <p:cNvSpPr>
+            <a:spLocks noGrp="1"/>
+          </p:cNvSpPr>
+          <p:nvPr>
+            <p:ph type="sldNum" sz="quarter" idx="5"/>
+          </p:nvPr>
+        </p:nvSpPr>
+        <p:spPr/>
+        <p:txBody>
+          <a:bodyPr/>
+          <a:lstStyle/>
+          <a:p>
+            <a:fld id="{2107F482-7FF7-4DD4-AE91-ACA70D5B43D5}" type="slidenum">
+              <a:rPr lang="es-CL" smtClean="0"/>
+              <a:t>27</a:t>
+            </a:fld>
+            <a:endParaRPr lang="es-CL"/>
+          </a:p>
+        </p:txBody>
+      </p:sp>
+    </p:spTree>
+    <p:extLst>
+      <p:ext uri="{BB962C8B-B14F-4D97-AF65-F5344CB8AC3E}">
+        <p14:creationId xmlns:p14="http://schemas.microsoft.com/office/powerpoint/2010/main" val="3424588303"/>
+      </p:ext>
+    </p:extLst>
+  </p:cSld>
+  <p:clrMapOvr>
+    <a:masterClrMapping/>
+  </p:clrMapOvr>
+</p:notes>
+</file>
+
+<file path=ppt/notesSlides/notesSlide24.xml><?xml version="1.0" encoding="utf-8"?>
+<p:notes xmlns:a="http://schemas.openxmlformats.org/drawingml/2006/main" xmlns:r="http://schemas.openxmlformats.org/officeDocument/2006/relationships" xmlns:p="http://schemas.openxmlformats.org/presentationml/2006/main">
+  <p:cSld>
+    <p:spTree>
+      <p:nvGrpSpPr>
+        <p:cNvPr id="1" name="">
+          <a:extLst>
+            <a:ext uri="{FF2B5EF4-FFF2-40B4-BE49-F238E27FC236}">
+              <a16:creationId xmlns:a16="http://schemas.microsoft.com/office/drawing/2014/main" id="{5964B4B3-4EDE-EF5C-D9F6-24C60EC95423}"/>
+            </a:ext>
+          </a:extLst>
+        </p:cNvPr>
+        <p:cNvGrpSpPr/>
+        <p:nvPr/>
+      </p:nvGrpSpPr>
+      <p:grpSpPr>
+        <a:xfrm>
+          <a:off x="0" y="0"/>
+          <a:ext cx="0" cy="0"/>
+          <a:chOff x="0" y="0"/>
+          <a:chExt cx="0" cy="0"/>
+        </a:xfrm>
+      </p:grpSpPr>
+      <p:sp>
+        <p:nvSpPr>
+          <p:cNvPr id="2" name="Marcador de imagen de diapositiva 1">
+            <a:extLst>
+              <a:ext uri="{FF2B5EF4-FFF2-40B4-BE49-F238E27FC236}">
+                <a16:creationId xmlns:a16="http://schemas.microsoft.com/office/drawing/2014/main" id="{529FD7A6-34F5-4B7E-A34E-AD1712E551AB}"/>
+              </a:ext>
+            </a:extLst>
+          </p:cNvPr>
+          <p:cNvSpPr>
+            <a:spLocks noGrp="1" noRot="1" noChangeAspect="1"/>
+          </p:cNvSpPr>
+          <p:nvPr>
+            <p:ph type="sldImg"/>
+          </p:nvPr>
+        </p:nvSpPr>
+        <p:spPr/>
+      </p:sp>
+      <p:sp>
+        <p:nvSpPr>
+          <p:cNvPr id="3" name="Marcador de notas 2">
+            <a:extLst>
+              <a:ext uri="{FF2B5EF4-FFF2-40B4-BE49-F238E27FC236}">
+                <a16:creationId xmlns:a16="http://schemas.microsoft.com/office/drawing/2014/main" id="{BEC6058E-D48B-6CBA-A12A-8D4BDE78C5DA}"/>
+              </a:ext>
+            </a:extLst>
+          </p:cNvPr>
+          <p:cNvSpPr>
+            <a:spLocks noGrp="1"/>
+          </p:cNvSpPr>
+          <p:nvPr>
+            <p:ph type="body" idx="1"/>
+          </p:nvPr>
+        </p:nvSpPr>
+        <p:spPr/>
+        <p:txBody>
+          <a:bodyPr/>
+          <a:lstStyle/>
+          <a:p>
+            <a:endParaRPr lang="es-CL" dirty="0"/>
+          </a:p>
+        </p:txBody>
+      </p:sp>
+      <p:sp>
+        <p:nvSpPr>
+          <p:cNvPr id="4" name="Marcador de número de diapositiva 3">
+            <a:extLst>
+              <a:ext uri="{FF2B5EF4-FFF2-40B4-BE49-F238E27FC236}">
+                <a16:creationId xmlns:a16="http://schemas.microsoft.com/office/drawing/2014/main" id="{92C0BE07-093E-CEB1-387C-6F2CB27EC61C}"/>
+              </a:ext>
+            </a:extLst>
+          </p:cNvPr>
+          <p:cNvSpPr>
+            <a:spLocks noGrp="1"/>
+          </p:cNvSpPr>
+          <p:nvPr>
+            <p:ph type="sldNum" sz="quarter" idx="5"/>
+          </p:nvPr>
+        </p:nvSpPr>
+        <p:spPr/>
+        <p:txBody>
+          <a:bodyPr/>
+          <a:lstStyle/>
+          <a:p>
+            <a:fld id="{2107F482-7FF7-4DD4-AE91-ACA70D5B43D5}" type="slidenum">
+              <a:rPr lang="es-CL" smtClean="0"/>
+              <a:t>28</a:t>
+            </a:fld>
+            <a:endParaRPr lang="es-CL"/>
+          </a:p>
+        </p:txBody>
+      </p:sp>
+    </p:spTree>
+    <p:extLst>
+      <p:ext uri="{BB962C8B-B14F-4D97-AF65-F5344CB8AC3E}">
+        <p14:creationId xmlns:p14="http://schemas.microsoft.com/office/powerpoint/2010/main" val="2908301346"/>
+      </p:ext>
+    </p:extLst>
+  </p:cSld>
+  <p:clrMapOvr>
+    <a:masterClrMapping/>
+  </p:clrMapOvr>
+</p:notes>
+</file>
+
+<file path=ppt/notesSlides/notesSlide25.xml><?xml version="1.0" encoding="utf-8"?>
+<p:notes xmlns:a="http://schemas.openxmlformats.org/drawingml/2006/main" xmlns:r="http://schemas.openxmlformats.org/officeDocument/2006/relationships" xmlns:p="http://schemas.openxmlformats.org/presentationml/2006/main">
+  <p:cSld>
+    <p:spTree>
+      <p:nvGrpSpPr>
+        <p:cNvPr id="1" name="">
+          <a:extLst>
+            <a:ext uri="{FF2B5EF4-FFF2-40B4-BE49-F238E27FC236}">
               <a16:creationId xmlns:a16="http://schemas.microsoft.com/office/drawing/2014/main" id="{AF418197-518D-4CC5-D2F6-5493A7413016}"/>
             </a:ext>
           </a:extLst>
@@ -1861,7 +2406,7 @@
           <a:p>
             <a:fld id="{2107F482-7FF7-4DD4-AE91-ACA70D5B43D5}" type="slidenum">
               <a:rPr lang="es-CL" smtClean="0"/>
-              <a:t>24</a:t>
+              <a:t>29</a:t>
             </a:fld>
             <a:endParaRPr lang="es-CL"/>
           </a:p>
@@ -2785,7 +3330,7 @@
           <a:p>
             <a:fld id="{E8BDA46D-A1A7-4D05-A86A-5A57D57622A5}" type="datetimeFigureOut">
               <a:rPr lang="es-CL" smtClean="0"/>
-              <a:t>23-03-2026</a:t>
+              <a:t>24-08-2026</a:t>
             </a:fld>
             <a:endParaRPr lang="es-CL"/>
           </a:p>
@@ -2985,7 +3530,7 @@
           <a:p>
             <a:fld id="{E8BDA46D-A1A7-4D05-A86A-5A57D57622A5}" type="datetimeFigureOut">
               <a:rPr lang="es-CL" smtClean="0"/>
-              <a:t>23-03-2026</a:t>
+              <a:t>24-08-2026</a:t>
             </a:fld>
             <a:endParaRPr lang="es-CL"/>
           </a:p>
@@ -3195,7 +3740,7 @@
           <a:p>
             <a:fld id="{E8BDA46D-A1A7-4D05-A86A-5A57D57622A5}" type="datetimeFigureOut">
               <a:rPr lang="es-CL" smtClean="0"/>
-              <a:t>23-03-2026</a:t>
+              <a:t>24-08-2026</a:t>
             </a:fld>
             <a:endParaRPr lang="es-CL"/>
           </a:p>
@@ -3395,7 +3940,7 @@
           <a:p>
             <a:fld id="{E8BDA46D-A1A7-4D05-A86A-5A57D57622A5}" type="datetimeFigureOut">
               <a:rPr lang="es-CL" smtClean="0"/>
-              <a:t>23-03-2026</a:t>
+              <a:t>24-08-2026</a:t>
             </a:fld>
             <a:endParaRPr lang="es-CL"/>
           </a:p>
@@ -3671,7 +4216,7 @@
           <a:p>
             <a:fld id="{E8BDA46D-A1A7-4D05-A86A-5A57D57622A5}" type="datetimeFigureOut">
               <a:rPr lang="es-CL" smtClean="0"/>
-              <a:t>23-03-2026</a:t>
+              <a:t>24-08-2026</a:t>
             </a:fld>
             <a:endParaRPr lang="es-CL"/>
           </a:p>
@@ -3939,7 +4484,7 @@
           <a:p>
             <a:fld id="{E8BDA46D-A1A7-4D05-A86A-5A57D57622A5}" type="datetimeFigureOut">
               <a:rPr lang="es-CL" smtClean="0"/>
-              <a:t>23-03-2026</a:t>
+              <a:t>24-08-2026</a:t>
             </a:fld>
             <a:endParaRPr lang="es-CL"/>
           </a:p>
@@ -4354,7 +4899,7 @@
           <a:p>
             <a:fld id="{E8BDA46D-A1A7-4D05-A86A-5A57D57622A5}" type="datetimeFigureOut">
               <a:rPr lang="es-CL" smtClean="0"/>
-              <a:t>23-03-2026</a:t>
+              <a:t>24-08-2026</a:t>
             </a:fld>
             <a:endParaRPr lang="es-CL"/>
           </a:p>
@@ -4496,7 +5041,7 @@
           <a:p>
             <a:fld id="{E8BDA46D-A1A7-4D05-A86A-5A57D57622A5}" type="datetimeFigureOut">
               <a:rPr lang="es-CL" smtClean="0"/>
-              <a:t>23-03-2026</a:t>
+              <a:t>24-08-2026</a:t>
             </a:fld>
             <a:endParaRPr lang="es-CL"/>
           </a:p>
@@ -4609,7 +5154,7 @@
           <a:p>
             <a:fld id="{E8BDA46D-A1A7-4D05-A86A-5A57D57622A5}" type="datetimeFigureOut">
               <a:rPr lang="es-CL" smtClean="0"/>
-              <a:t>23-03-2026</a:t>
+              <a:t>24-08-2026</a:t>
             </a:fld>
             <a:endParaRPr lang="es-CL"/>
           </a:p>
@@ -4922,7 +5467,7 @@
           <a:p>
             <a:fld id="{E8BDA46D-A1A7-4D05-A86A-5A57D57622A5}" type="datetimeFigureOut">
               <a:rPr lang="es-CL" smtClean="0"/>
-              <a:t>23-03-2026</a:t>
+              <a:t>24-08-2026</a:t>
             </a:fld>
             <a:endParaRPr lang="es-CL"/>
           </a:p>
@@ -5211,7 +5756,7 @@
           <a:p>
             <a:fld id="{E8BDA46D-A1A7-4D05-A86A-5A57D57622A5}" type="datetimeFigureOut">
               <a:rPr lang="es-CL" smtClean="0"/>
-              <a:t>23-03-2026</a:t>
+              <a:t>24-08-2026</a:t>
             </a:fld>
             <a:endParaRPr lang="es-CL"/>
           </a:p>
@@ -5454,7 +5999,7 @@
           <a:p>
             <a:fld id="{E8BDA46D-A1A7-4D05-A86A-5A57D57622A5}" type="datetimeFigureOut">
               <a:rPr lang="es-CL" smtClean="0"/>
-              <a:t>23-03-2026</a:t>
+              <a:t>24-08-2026</a:t>
             </a:fld>
             <a:endParaRPr lang="es-CL"/>
           </a:p>
@@ -6191,7 +6736,7 @@
             <a:pPr algn="l"/>
             <a:r>
               <a:rPr lang="es-MX" sz="1800" i="1" dirty="0"/>
-              <a:t>Semestre 2026-1</a:t>
+              <a:t>Semestre 2026-2</a:t>
             </a:r>
             <a:endParaRPr lang="es-CL" sz="1800" i="1" dirty="0"/>
           </a:p>
@@ -10820,7 +11365,7 @@
         <p:spPr>
           <a:xfrm>
             <a:off x="7168791" y="1368141"/>
-            <a:ext cx="4402896" cy="4832092"/>
+            <a:ext cx="4402896" cy="4555093"/>
           </a:xfrm>
           <a:prstGeom prst="rect">
             <a:avLst/>
@@ -10834,24 +11379,34 @@
           <a:lstStyle/>
           <a:p>
             <a:r>
-              <a:rPr lang="es-MX" dirty="0"/>
+              <a:rPr lang="es-MX" dirty="0">
+                <a:latin typeface="+mj-lt"/>
+              </a:rPr>
               <a:t>La similitud de coseno es la manera para determinar algebraicamente si dos vectores son similares o no. </a:t>
             </a:r>
           </a:p>
           <a:p>
-            <a:endParaRPr lang="es-MX" dirty="0"/>
-          </a:p>
-          <a:p>
-            <a:r>
-              <a:rPr lang="es-MX" dirty="0"/>
+            <a:endParaRPr lang="es-MX" dirty="0">
+              <a:latin typeface="+mj-lt"/>
+            </a:endParaRPr>
+          </a:p>
+          <a:p>
+            <a:r>
+              <a:rPr lang="es-MX" dirty="0">
+                <a:latin typeface="+mj-lt"/>
+              </a:rPr>
               <a:t>El resultado va de </a:t>
             </a:r>
             <a:r>
-              <a:rPr lang="es-MX" b="1" dirty="0"/>
+              <a:rPr lang="es-MX" b="1" dirty="0">
+                <a:latin typeface="+mj-lt"/>
+              </a:rPr>
               <a:t>-1 a 1</a:t>
             </a:r>
             <a:r>
-              <a:rPr lang="es-MX" dirty="0"/>
+              <a:rPr lang="es-MX" dirty="0">
+                <a:latin typeface="+mj-lt"/>
+              </a:rPr>
               <a:t>:</a:t>
             </a:r>
           </a:p>
@@ -10861,11 +11416,15 @@
               <a:buChar char="•"/>
             </a:pPr>
             <a:r>
-              <a:rPr lang="es-MX" b="1" dirty="0"/>
+              <a:rPr lang="es-MX" b="1" dirty="0">
+                <a:latin typeface="+mj-lt"/>
+              </a:rPr>
               <a:t>  1</a:t>
             </a:r>
             <a:r>
-              <a:rPr lang="es-MX" dirty="0"/>
+              <a:rPr lang="es-MX" dirty="0">
+                <a:latin typeface="+mj-lt"/>
+              </a:rPr>
               <a:t> = vectores idénticos (misma  dirección)</a:t>
             </a:r>
           </a:p>
@@ -10875,11 +11434,15 @@
               <a:buChar char="•"/>
             </a:pPr>
             <a:r>
-              <a:rPr lang="es-MX" b="1" dirty="0"/>
+              <a:rPr lang="es-MX" b="1" dirty="0">
+                <a:latin typeface="+mj-lt"/>
+              </a:rPr>
               <a:t>0</a:t>
             </a:r>
             <a:r>
-              <a:rPr lang="es-MX" dirty="0"/>
+              <a:rPr lang="es-MX" dirty="0">
+                <a:latin typeface="+mj-lt"/>
+              </a:rPr>
               <a:t> = vectores perpendiculares (sin relación)</a:t>
             </a:r>
           </a:p>
@@ -10889,31 +11452,42 @@
               <a:buChar char="•"/>
             </a:pPr>
             <a:r>
-              <a:rPr lang="es-MX" b="1" dirty="0"/>
+              <a:rPr lang="es-MX" b="1" dirty="0">
+                <a:latin typeface="+mj-lt"/>
+              </a:rPr>
               <a:t>-1</a:t>
             </a:r>
             <a:r>
-              <a:rPr lang="es-MX" dirty="0"/>
+              <a:rPr lang="es-MX" dirty="0">
+                <a:latin typeface="+mj-lt"/>
+              </a:rPr>
               <a:t> = vectores opuestos</a:t>
             </a:r>
           </a:p>
           <a:p>
-            <a:endParaRPr lang="es-MX" dirty="0"/>
-          </a:p>
-          <a:p>
-            <a:r>
-              <a:rPr lang="es-MX" dirty="0"/>
+            <a:endParaRPr lang="es-MX" dirty="0">
+              <a:latin typeface="+mj-lt"/>
+            </a:endParaRPr>
+          </a:p>
+          <a:p>
+            <a:r>
+              <a:rPr lang="es-MX" dirty="0">
+                <a:latin typeface="+mj-lt"/>
+              </a:rPr>
               <a:t>Los </a:t>
             </a:r>
             <a:r>
-              <a:rPr lang="es-MX" dirty="0" err="1"/>
+              <a:rPr lang="es-MX" dirty="0" err="1">
+                <a:latin typeface="+mj-lt"/>
+              </a:rPr>
               <a:t>embeddings</a:t>
             </a:r>
             <a:r>
-              <a:rPr lang="es-MX" dirty="0"/>
+              <a:rPr lang="es-MX" dirty="0">
+                <a:latin typeface="+mj-lt"/>
+              </a:rPr>
               <a:t> de texto producen vectores cuyos valores de similitud coseno van de 0 a 1 en la práctica, donde valores cercanos a 1 indican mayor similitud semántica entre los textos comparados.</a:t>
             </a:r>
-            <a:endParaRPr lang="es-MX" i="1" dirty="0"/>
           </a:p>
           <a:p>
             <a:pPr algn="ctr"/>
@@ -10942,7 +11516,7 @@
         <p:cNvPr id="1" name="">
           <a:extLst>
             <a:ext uri="{FF2B5EF4-FFF2-40B4-BE49-F238E27FC236}">
-              <a16:creationId xmlns:a16="http://schemas.microsoft.com/office/drawing/2014/main" id="{6E3539C1-8FAA-7F04-DF2D-6A6AF94BE4D3}"/>
+              <a16:creationId xmlns:a16="http://schemas.microsoft.com/office/drawing/2014/main" id="{1B6E69F5-BD40-2800-BBD6-5C3AA517B14B}"/>
             </a:ext>
           </a:extLst>
         </p:cNvPr>
@@ -10959,10 +11533,64 @@
       </p:grpSpPr>
       <p:sp>
         <p:nvSpPr>
+          <p:cNvPr id="7" name="Rectángulo 6">
+            <a:extLst>
+              <a:ext uri="{FF2B5EF4-FFF2-40B4-BE49-F238E27FC236}">
+                <a16:creationId xmlns:a16="http://schemas.microsoft.com/office/drawing/2014/main" id="{F56763A4-EB28-2C82-23CD-89CDB0ED8374}"/>
+              </a:ext>
+            </a:extLst>
+          </p:cNvPr>
+          <p:cNvSpPr/>
+          <p:nvPr/>
+        </p:nvSpPr>
+        <p:spPr>
+          <a:xfrm>
+            <a:off x="624031" y="3016469"/>
+            <a:ext cx="1933247" cy="2412124"/>
+          </a:xfrm>
+          <a:prstGeom prst="rect">
+            <a:avLst/>
+          </a:prstGeom>
+          <a:solidFill>
+            <a:schemeClr val="bg1"/>
+          </a:solidFill>
+          <a:ln w="57150">
+            <a:solidFill>
+              <a:srgbClr val="0070C0"/>
+            </a:solidFill>
+          </a:ln>
+        </p:spPr>
+        <p:style>
+          <a:lnRef idx="2">
+            <a:schemeClr val="accent1">
+              <a:shade val="15000"/>
+            </a:schemeClr>
+          </a:lnRef>
+          <a:fillRef idx="1">
+            <a:schemeClr val="accent1"/>
+          </a:fillRef>
+          <a:effectRef idx="0">
+            <a:schemeClr val="accent1"/>
+          </a:effectRef>
+          <a:fontRef idx="minor">
+            <a:schemeClr val="lt1"/>
+          </a:fontRef>
+        </p:style>
+        <p:txBody>
+          <a:bodyPr rtlCol="0" anchor="ctr"/>
+          <a:lstStyle/>
+          <a:p>
+            <a:pPr algn="ctr"/>
+            <a:endParaRPr lang="es-CL"/>
+          </a:p>
+        </p:txBody>
+      </p:sp>
+      <p:sp>
+        <p:nvSpPr>
           <p:cNvPr id="2" name="Título 1">
             <a:extLst>
               <a:ext uri="{FF2B5EF4-FFF2-40B4-BE49-F238E27FC236}">
-                <a16:creationId xmlns:a16="http://schemas.microsoft.com/office/drawing/2014/main" id="{C742F8BA-2DB6-3DDF-44D3-6A85D1A2F5D5}"/>
+                <a16:creationId xmlns:a16="http://schemas.microsoft.com/office/drawing/2014/main" id="{96AE02A8-148E-B502-F2B3-BF1C84FCE259}"/>
               </a:ext>
             </a:extLst>
           </p:cNvPr>
@@ -10975,7 +11603,7 @@
         </p:nvSpPr>
         <p:spPr>
           <a:xfrm>
-            <a:off x="4226542" y="2576704"/>
+            <a:off x="452147" y="308714"/>
             <a:ext cx="10515600" cy="1325563"/>
           </a:xfrm>
         </p:spPr>
@@ -10986,8 +11614,12 @@
           <a:lstStyle/>
           <a:p>
             <a:r>
+              <a:rPr lang="es-MX" sz="3600" b="1" i="1" dirty="0"/>
+              <a:t>Bases vectoriales</a:t>
+            </a:r>
+            <a:r>
               <a:rPr lang="es-MX" sz="3600" i="1" dirty="0"/>
-              <a:t>¿Qué falta aquí?</a:t>
+              <a:t>: Se han popularizado muchas en el ultimo tiempo.</a:t>
             </a:r>
             <a:endParaRPr lang="es-CL" sz="3600" i="1" dirty="0"/>
           </a:p>
@@ -10998,7 +11630,7 @@
           <p:cNvPr id="4" name="Picture 2" descr="Duoc UC - Learn Chile">
             <a:extLst>
               <a:ext uri="{FF2B5EF4-FFF2-40B4-BE49-F238E27FC236}">
-                <a16:creationId xmlns:a16="http://schemas.microsoft.com/office/drawing/2014/main" id="{7BC56528-ED7A-AA7A-3DA6-09B6CC5E10B8}"/>
+                <a16:creationId xmlns:a16="http://schemas.microsoft.com/office/drawing/2014/main" id="{87751112-B0F4-BFBE-B898-933C9C3539BE}"/>
               </a:ext>
             </a:extLst>
           </p:cNvPr>
@@ -11040,10 +11672,292 @@
           </a:extLst>
         </p:spPr>
       </p:pic>
+      <p:pic>
+        <p:nvPicPr>
+          <p:cNvPr id="1026" name="Picture 2" descr="ChromaDB: An Overview. ChromaDB is a powerful vector database… | by VIKRANT SINGH | Medium">
+            <a:extLst>
+              <a:ext uri="{FF2B5EF4-FFF2-40B4-BE49-F238E27FC236}">
+                <a16:creationId xmlns:a16="http://schemas.microsoft.com/office/drawing/2014/main" id="{2186E22B-0D81-871F-C5C7-5E9D8D158A25}"/>
+              </a:ext>
+            </a:extLst>
+          </p:cNvPr>
+          <p:cNvPicPr>
+            <a:picLocks noChangeAspect="1" noChangeArrowheads="1"/>
+          </p:cNvPicPr>
+          <p:nvPr/>
+        </p:nvPicPr>
+        <p:blipFill>
+          <a:blip r:embed="rId4">
+            <a:extLst>
+              <a:ext uri="{28A0092B-C50C-407E-A947-70E740481C1C}">
+                <a14:useLocalDpi xmlns:a14="http://schemas.microsoft.com/office/drawing/2010/main" val="0"/>
+              </a:ext>
+            </a:extLst>
+          </a:blip>
+          <a:srcRect/>
+          <a:stretch>
+            <a:fillRect/>
+          </a:stretch>
+        </p:blipFill>
+        <p:spPr bwMode="auto">
+          <a:xfrm>
+            <a:off x="2624262" y="1750841"/>
+            <a:ext cx="2293391" cy="2164639"/>
+          </a:xfrm>
+          <a:prstGeom prst="rect">
+            <a:avLst/>
+          </a:prstGeom>
+          <a:noFill/>
+          <a:extLst>
+            <a:ext uri="{909E8E84-426E-40DD-AFC4-6F175D3DCCD1}">
+              <a14:hiddenFill xmlns:a14="http://schemas.microsoft.com/office/drawing/2010/main">
+                <a:solidFill>
+                  <a:srgbClr val="FFFFFF"/>
+                </a:solidFill>
+              </a14:hiddenFill>
+            </a:ext>
+          </a:extLst>
+        </p:spPr>
+      </p:pic>
+      <p:pic>
+        <p:nvPicPr>
+          <p:cNvPr id="1028" name="Picture 4" descr="Pinecone Makes Accurate, Fast, Scalable Generative AI Accessible to  Organizations Large and Small with Launch of its Serverless Vector Database">
+            <a:extLst>
+              <a:ext uri="{FF2B5EF4-FFF2-40B4-BE49-F238E27FC236}">
+                <a16:creationId xmlns:a16="http://schemas.microsoft.com/office/drawing/2014/main" id="{4B67900D-1402-5979-DF4F-93331A01229F}"/>
+              </a:ext>
+            </a:extLst>
+          </p:cNvPr>
+          <p:cNvPicPr>
+            <a:picLocks noChangeAspect="1" noChangeArrowheads="1"/>
+          </p:cNvPicPr>
+          <p:nvPr/>
+        </p:nvPicPr>
+        <p:blipFill>
+          <a:blip r:embed="rId5">
+            <a:extLst>
+              <a:ext uri="{28A0092B-C50C-407E-A947-70E740481C1C}">
+                <a14:useLocalDpi xmlns:a14="http://schemas.microsoft.com/office/drawing/2010/main" val="0"/>
+              </a:ext>
+            </a:extLst>
+          </a:blip>
+          <a:srcRect/>
+          <a:stretch>
+            <a:fillRect/>
+          </a:stretch>
+        </p:blipFill>
+        <p:spPr bwMode="auto">
+          <a:xfrm>
+            <a:off x="5253048" y="1429407"/>
+            <a:ext cx="4124150" cy="2164639"/>
+          </a:xfrm>
+          <a:prstGeom prst="rect">
+            <a:avLst/>
+          </a:prstGeom>
+          <a:noFill/>
+          <a:extLst>
+            <a:ext uri="{909E8E84-426E-40DD-AFC4-6F175D3DCCD1}">
+              <a14:hiddenFill xmlns:a14="http://schemas.microsoft.com/office/drawing/2010/main">
+                <a:solidFill>
+                  <a:srgbClr val="FFFFFF"/>
+                </a:solidFill>
+              </a14:hiddenFill>
+            </a:ext>
+          </a:extLst>
+        </p:spPr>
+      </p:pic>
+      <p:pic>
+        <p:nvPicPr>
+          <p:cNvPr id="1030" name="Picture 6" descr="Weaviate Reviews 2026: Details, Pricing, &amp; Features | G2">
+            <a:extLst>
+              <a:ext uri="{FF2B5EF4-FFF2-40B4-BE49-F238E27FC236}">
+                <a16:creationId xmlns:a16="http://schemas.microsoft.com/office/drawing/2014/main" id="{A1FCCE79-1D2B-124D-DE8D-1B0A7DCF36D1}"/>
+              </a:ext>
+            </a:extLst>
+          </p:cNvPr>
+          <p:cNvPicPr>
+            <a:picLocks noChangeAspect="1" noChangeArrowheads="1"/>
+          </p:cNvPicPr>
+          <p:nvPr/>
+        </p:nvPicPr>
+        <p:blipFill>
+          <a:blip r:embed="rId6">
+            <a:extLst>
+              <a:ext uri="{28A0092B-C50C-407E-A947-70E740481C1C}">
+                <a14:useLocalDpi xmlns:a14="http://schemas.microsoft.com/office/drawing/2010/main" val="0"/>
+              </a:ext>
+            </a:extLst>
+          </a:blip>
+          <a:srcRect/>
+          <a:stretch>
+            <a:fillRect/>
+          </a:stretch>
+        </p:blipFill>
+        <p:spPr bwMode="auto">
+          <a:xfrm>
+            <a:off x="5129376" y="3495346"/>
+            <a:ext cx="1933247" cy="1933247"/>
+          </a:xfrm>
+          <a:prstGeom prst="rect">
+            <a:avLst/>
+          </a:prstGeom>
+          <a:noFill/>
+          <a:extLst>
+            <a:ext uri="{909E8E84-426E-40DD-AFC4-6F175D3DCCD1}">
+              <a14:hiddenFill xmlns:a14="http://schemas.microsoft.com/office/drawing/2010/main">
+                <a:solidFill>
+                  <a:srgbClr val="FFFFFF"/>
+                </a:solidFill>
+              </a14:hiddenFill>
+            </a:ext>
+          </a:extLst>
+        </p:spPr>
+      </p:pic>
+      <p:pic>
+        <p:nvPicPr>
+          <p:cNvPr id="1032" name="Picture 8" descr="What Is FAISS (Facebook AI Similarity Search)? How Does It Work?">
+            <a:extLst>
+              <a:ext uri="{FF2B5EF4-FFF2-40B4-BE49-F238E27FC236}">
+                <a16:creationId xmlns:a16="http://schemas.microsoft.com/office/drawing/2014/main" id="{F2EB1AF8-20B2-33C0-4ED9-FDC969F597F9}"/>
+              </a:ext>
+            </a:extLst>
+          </p:cNvPr>
+          <p:cNvPicPr>
+            <a:picLocks noChangeAspect="1" noChangeArrowheads="1"/>
+          </p:cNvPicPr>
+          <p:nvPr/>
+        </p:nvPicPr>
+        <p:blipFill>
+          <a:blip r:embed="rId7">
+            <a:extLst>
+              <a:ext uri="{28A0092B-C50C-407E-A947-70E740481C1C}">
+                <a14:useLocalDpi xmlns:a14="http://schemas.microsoft.com/office/drawing/2010/main" val="0"/>
+              </a:ext>
+            </a:extLst>
+          </a:blip>
+          <a:srcRect/>
+          <a:stretch>
+            <a:fillRect/>
+          </a:stretch>
+        </p:blipFill>
+        <p:spPr bwMode="auto">
+          <a:xfrm>
+            <a:off x="7593571" y="3495346"/>
+            <a:ext cx="2858515" cy="1719920"/>
+          </a:xfrm>
+          <a:prstGeom prst="rect">
+            <a:avLst/>
+          </a:prstGeom>
+          <a:noFill/>
+          <a:extLst>
+            <a:ext uri="{909E8E84-426E-40DD-AFC4-6F175D3DCCD1}">
+              <a14:hiddenFill xmlns:a14="http://schemas.microsoft.com/office/drawing/2010/main">
+                <a:solidFill>
+                  <a:srgbClr val="FFFFFF"/>
+                </a:solidFill>
+              </a14:hiddenFill>
+            </a:ext>
+          </a:extLst>
+        </p:spPr>
+      </p:pic>
+      <p:pic>
+        <p:nvPicPr>
+          <p:cNvPr id="1034" name="Picture 10" descr="GitHub - Mohitkr95/qdrant-multi-node-cluster: Scalable Qdrant vector database cluster with Docker Compose, monitoring, and comprehensive documentation for high-performance similarity search applications. · GitHub">
+            <a:extLst>
+              <a:ext uri="{FF2B5EF4-FFF2-40B4-BE49-F238E27FC236}">
+                <a16:creationId xmlns:a16="http://schemas.microsoft.com/office/drawing/2014/main" id="{4FF662C9-1B8E-B52F-81BD-9A07ECF9C3ED}"/>
+              </a:ext>
+            </a:extLst>
+          </p:cNvPr>
+          <p:cNvPicPr>
+            <a:picLocks noChangeAspect="1" noChangeArrowheads="1"/>
+          </p:cNvPicPr>
+          <p:nvPr/>
+        </p:nvPicPr>
+        <p:blipFill>
+          <a:blip r:embed="rId8">
+            <a:extLst>
+              <a:ext uri="{28A0092B-C50C-407E-A947-70E740481C1C}">
+                <a14:useLocalDpi xmlns:a14="http://schemas.microsoft.com/office/drawing/2010/main" val="0"/>
+              </a:ext>
+            </a:extLst>
+          </a:blip>
+          <a:srcRect/>
+          <a:stretch>
+            <a:fillRect/>
+          </a:stretch>
+        </p:blipFill>
+        <p:spPr bwMode="auto">
+          <a:xfrm>
+            <a:off x="2658764" y="5565228"/>
+            <a:ext cx="2224385" cy="749682"/>
+          </a:xfrm>
+          <a:prstGeom prst="rect">
+            <a:avLst/>
+          </a:prstGeom>
+          <a:noFill/>
+          <a:extLst>
+            <a:ext uri="{909E8E84-426E-40DD-AFC4-6F175D3DCCD1}">
+              <a14:hiddenFill xmlns:a14="http://schemas.microsoft.com/office/drawing/2010/main">
+                <a:solidFill>
+                  <a:srgbClr val="FFFFFF"/>
+                </a:solidFill>
+              </a14:hiddenFill>
+            </a:ext>
+          </a:extLst>
+        </p:spPr>
+      </p:pic>
+      <p:pic>
+        <p:nvPicPr>
+          <p:cNvPr id="1036" name="Picture 12" descr="What is MongoDB? NoSQL database explained in an easy way.">
+            <a:extLst>
+              <a:ext uri="{FF2B5EF4-FFF2-40B4-BE49-F238E27FC236}">
+                <a16:creationId xmlns:a16="http://schemas.microsoft.com/office/drawing/2014/main" id="{41A4C4AD-F9F8-00E2-9848-8CCBF98605E0}"/>
+              </a:ext>
+            </a:extLst>
+          </p:cNvPr>
+          <p:cNvPicPr>
+            <a:picLocks noChangeAspect="1" noChangeArrowheads="1"/>
+          </p:cNvPicPr>
+          <p:nvPr/>
+        </p:nvPicPr>
+        <p:blipFill>
+          <a:blip r:embed="rId9">
+            <a:extLst>
+              <a:ext uri="{28A0092B-C50C-407E-A947-70E740481C1C}">
+                <a14:useLocalDpi xmlns:a14="http://schemas.microsoft.com/office/drawing/2010/main" val="0"/>
+              </a:ext>
+            </a:extLst>
+          </a:blip>
+          <a:srcRect/>
+          <a:stretch>
+            <a:fillRect/>
+          </a:stretch>
+        </p:blipFill>
+        <p:spPr bwMode="auto">
+          <a:xfrm>
+            <a:off x="844239" y="3178230"/>
+            <a:ext cx="1514549" cy="2037036"/>
+          </a:xfrm>
+          <a:prstGeom prst="rect">
+            <a:avLst/>
+          </a:prstGeom>
+          <a:noFill/>
+          <a:extLst>
+            <a:ext uri="{909E8E84-426E-40DD-AFC4-6F175D3DCCD1}">
+              <a14:hiddenFill xmlns:a14="http://schemas.microsoft.com/office/drawing/2010/main">
+                <a:solidFill>
+                  <a:srgbClr val="FFFFFF"/>
+                </a:solidFill>
+              </a14:hiddenFill>
+            </a:ext>
+          </a:extLst>
+        </p:spPr>
+      </p:pic>
     </p:spTree>
     <p:extLst>
       <p:ext uri="{BB962C8B-B14F-4D97-AF65-F5344CB8AC3E}">
-        <p14:creationId xmlns:p14="http://schemas.microsoft.com/office/powerpoint/2010/main" val="1652729075"/>
+        <p14:creationId xmlns:p14="http://schemas.microsoft.com/office/powerpoint/2010/main" val="2446715989"/>
       </p:ext>
     </p:extLst>
   </p:cSld>
@@ -11438,6 +12352,1464 @@
         <p:cNvPr id="1" name="">
           <a:extLst>
             <a:ext uri="{FF2B5EF4-FFF2-40B4-BE49-F238E27FC236}">
+              <a16:creationId xmlns:a16="http://schemas.microsoft.com/office/drawing/2014/main" id="{AE14DF21-0F11-1723-E58B-1CA3E6463A2E}"/>
+            </a:ext>
+          </a:extLst>
+        </p:cNvPr>
+        <p:cNvGrpSpPr/>
+        <p:nvPr/>
+      </p:nvGrpSpPr>
+      <p:grpSpPr>
+        <a:xfrm>
+          <a:off x="0" y="0"/>
+          <a:ext cx="0" cy="0"/>
+          <a:chOff x="0" y="0"/>
+          <a:chExt cx="0" cy="0"/>
+        </a:xfrm>
+      </p:grpSpPr>
+      <p:sp>
+        <p:nvSpPr>
+          <p:cNvPr id="2" name="Título 1">
+            <a:extLst>
+              <a:ext uri="{FF2B5EF4-FFF2-40B4-BE49-F238E27FC236}">
+                <a16:creationId xmlns:a16="http://schemas.microsoft.com/office/drawing/2014/main" id="{ADF78F85-D2B3-F446-A680-DF5A45EB98EB}"/>
+              </a:ext>
+            </a:extLst>
+          </p:cNvPr>
+          <p:cNvSpPr>
+            <a:spLocks noGrp="1"/>
+          </p:cNvSpPr>
+          <p:nvPr>
+            <p:ph type="title"/>
+          </p:nvPr>
+        </p:nvSpPr>
+        <p:spPr>
+          <a:xfrm>
+            <a:off x="452147" y="308714"/>
+            <a:ext cx="10515600" cy="1325563"/>
+          </a:xfrm>
+        </p:spPr>
+        <p:txBody>
+          <a:bodyPr>
+            <a:noAutofit/>
+          </a:bodyPr>
+          <a:lstStyle/>
+          <a:p>
+            <a:r>
+              <a:rPr lang="es-MX" sz="3600" b="1" i="1" dirty="0" err="1"/>
+              <a:t>Reranking</a:t>
+            </a:r>
+            <a:r>
+              <a:rPr lang="es-MX" sz="3600" i="1" dirty="0"/>
+              <a:t>: El “reordenamiento” de los </a:t>
+            </a:r>
+            <a:r>
+              <a:rPr lang="es-MX" sz="3600" i="1" dirty="0" err="1"/>
+              <a:t>chunks</a:t>
+            </a:r>
+            <a:endParaRPr lang="es-CL" sz="3600" i="1" dirty="0"/>
+          </a:p>
+        </p:txBody>
+      </p:sp>
+      <p:pic>
+        <p:nvPicPr>
+          <p:cNvPr id="4" name="Picture 2" descr="Duoc UC - Learn Chile">
+            <a:extLst>
+              <a:ext uri="{FF2B5EF4-FFF2-40B4-BE49-F238E27FC236}">
+                <a16:creationId xmlns:a16="http://schemas.microsoft.com/office/drawing/2014/main" id="{FF476D4B-A1FD-6CAE-FA91-041C2F2F36D9}"/>
+              </a:ext>
+            </a:extLst>
+          </p:cNvPr>
+          <p:cNvPicPr>
+            <a:picLocks noChangeAspect="1" noChangeArrowheads="1"/>
+          </p:cNvPicPr>
+          <p:nvPr/>
+        </p:nvPicPr>
+        <p:blipFill>
+          <a:blip r:embed="rId3">
+            <a:extLst>
+              <a:ext uri="{28A0092B-C50C-407E-A947-70E740481C1C}">
+                <a14:useLocalDpi xmlns:a14="http://schemas.microsoft.com/office/drawing/2010/main" val="0"/>
+              </a:ext>
+            </a:extLst>
+          </a:blip>
+          <a:srcRect/>
+          <a:stretch>
+            <a:fillRect/>
+          </a:stretch>
+        </p:blipFill>
+        <p:spPr bwMode="auto">
+          <a:xfrm>
+            <a:off x="11135913" y="30480"/>
+            <a:ext cx="974807" cy="825402"/>
+          </a:xfrm>
+          <a:prstGeom prst="rect">
+            <a:avLst/>
+          </a:prstGeom>
+          <a:noFill/>
+          <a:extLst>
+            <a:ext uri="{909E8E84-426E-40DD-AFC4-6F175D3DCCD1}">
+              <a14:hiddenFill xmlns:a14="http://schemas.microsoft.com/office/drawing/2010/main">
+                <a:solidFill>
+                  <a:srgbClr val="FFFFFF"/>
+                </a:solidFill>
+              </a14:hiddenFill>
+            </a:ext>
+          </a:extLst>
+        </p:spPr>
+      </p:pic>
+      <p:pic>
+        <p:nvPicPr>
+          <p:cNvPr id="2050" name="Picture 2" descr="Embedding-Based Retrieval in Friend Recommendation">
+            <a:extLst>
+              <a:ext uri="{FF2B5EF4-FFF2-40B4-BE49-F238E27FC236}">
+                <a16:creationId xmlns:a16="http://schemas.microsoft.com/office/drawing/2014/main" id="{945871C8-EE12-13CA-A9CE-C8895BEBC51F}"/>
+              </a:ext>
+            </a:extLst>
+          </p:cNvPr>
+          <p:cNvPicPr>
+            <a:picLocks noChangeAspect="1" noChangeArrowheads="1"/>
+          </p:cNvPicPr>
+          <p:nvPr/>
+        </p:nvPicPr>
+        <p:blipFill>
+          <a:blip r:embed="rId4">
+            <a:extLst>
+              <a:ext uri="{28A0092B-C50C-407E-A947-70E740481C1C}">
+                <a14:useLocalDpi xmlns:a14="http://schemas.microsoft.com/office/drawing/2010/main" val="0"/>
+              </a:ext>
+            </a:extLst>
+          </a:blip>
+          <a:srcRect/>
+          <a:stretch>
+            <a:fillRect/>
+          </a:stretch>
+        </p:blipFill>
+        <p:spPr bwMode="auto">
+          <a:xfrm>
+            <a:off x="903889" y="1634277"/>
+            <a:ext cx="6947338" cy="3995465"/>
+          </a:xfrm>
+          <a:prstGeom prst="rect">
+            <a:avLst/>
+          </a:prstGeom>
+          <a:noFill/>
+          <a:extLst>
+            <a:ext uri="{909E8E84-426E-40DD-AFC4-6F175D3DCCD1}">
+              <a14:hiddenFill xmlns:a14="http://schemas.microsoft.com/office/drawing/2010/main">
+                <a:solidFill>
+                  <a:srgbClr val="FFFFFF"/>
+                </a:solidFill>
+              </a14:hiddenFill>
+            </a:ext>
+          </a:extLst>
+        </p:spPr>
+      </p:pic>
+      <p:sp>
+        <p:nvSpPr>
+          <p:cNvPr id="3" name="CuadroTexto 2">
+            <a:extLst>
+              <a:ext uri="{FF2B5EF4-FFF2-40B4-BE49-F238E27FC236}">
+                <a16:creationId xmlns:a16="http://schemas.microsoft.com/office/drawing/2014/main" id="{3058629B-839B-6AB7-F491-05167E7F0371}"/>
+              </a:ext>
+            </a:extLst>
+          </p:cNvPr>
+          <p:cNvSpPr txBox="1"/>
+          <p:nvPr/>
+        </p:nvSpPr>
+        <p:spPr>
+          <a:xfrm>
+            <a:off x="8083549" y="2043206"/>
+            <a:ext cx="3614466" cy="4524315"/>
+          </a:xfrm>
+          <a:prstGeom prst="rect">
+            <a:avLst/>
+          </a:prstGeom>
+          <a:noFill/>
+        </p:spPr>
+        <p:txBody>
+          <a:bodyPr wrap="square">
+            <a:spAutoFit/>
+          </a:bodyPr>
+          <a:lstStyle/>
+          <a:p>
+            <a:pPr>
+              <a:buNone/>
+            </a:pPr>
+            <a:r>
+              <a:rPr lang="es-MX" i="1" dirty="0"/>
+              <a:t>Los sistemas de recomendación funcionan en dos etapas: </a:t>
+            </a:r>
+            <a:r>
+              <a:rPr lang="es-MX" i="1" dirty="0" err="1"/>
+              <a:t>retrieval</a:t>
+            </a:r>
+            <a:r>
+              <a:rPr lang="es-MX" i="1" dirty="0"/>
+              <a:t> y el ranking. </a:t>
+            </a:r>
+          </a:p>
+          <a:p>
+            <a:pPr>
+              <a:buNone/>
+            </a:pPr>
+            <a:endParaRPr lang="es-MX" i="1" dirty="0"/>
+          </a:p>
+          <a:p>
+            <a:pPr>
+              <a:buNone/>
+            </a:pPr>
+            <a:r>
+              <a:rPr lang="es-MX" i="1" dirty="0"/>
+              <a:t>En base a esto, la distancia de coseno era la </a:t>
+            </a:r>
+            <a:r>
+              <a:rPr lang="es-MX" i="1" dirty="0" err="1"/>
+              <a:t>retrieval</a:t>
+            </a:r>
+            <a:r>
+              <a:rPr lang="es-MX" i="1" dirty="0"/>
+              <a:t>, ahora faltaba la parte de ranking. </a:t>
+            </a:r>
+          </a:p>
+          <a:p>
+            <a:pPr>
+              <a:buNone/>
+            </a:pPr>
+            <a:endParaRPr lang="es-MX" i="1" dirty="0"/>
+          </a:p>
+          <a:p>
+            <a:pPr>
+              <a:buNone/>
+            </a:pPr>
+            <a:r>
+              <a:rPr lang="es-MX" i="1" dirty="0"/>
+              <a:t>Los investigadores y laboratorios encontraron que la búsqueda vectorial no era lo suficiente, por lo que, plantean añadirle otros concepto, que son los </a:t>
+            </a:r>
+            <a:r>
+              <a:rPr lang="es-MX" b="1" i="1" dirty="0"/>
+              <a:t>modelos de </a:t>
+            </a:r>
+            <a:r>
+              <a:rPr lang="es-MX" b="1" i="1" dirty="0" err="1"/>
+              <a:t>reranking</a:t>
+            </a:r>
+            <a:r>
+              <a:rPr lang="es-MX" b="1" i="1" dirty="0"/>
+              <a:t>.</a:t>
+            </a:r>
+          </a:p>
+          <a:p>
+            <a:pPr>
+              <a:buNone/>
+            </a:pPr>
+            <a:endParaRPr lang="es-MX" b="1" dirty="0"/>
+          </a:p>
+          <a:p>
+            <a:pPr>
+              <a:buNone/>
+            </a:pPr>
+            <a:r>
+              <a:rPr lang="es-MX" b="1" dirty="0"/>
+              <a:t> </a:t>
+            </a:r>
+            <a:endParaRPr lang="es-MX" dirty="0"/>
+          </a:p>
+        </p:txBody>
+      </p:sp>
+    </p:spTree>
+    <p:extLst>
+      <p:ext uri="{BB962C8B-B14F-4D97-AF65-F5344CB8AC3E}">
+        <p14:creationId xmlns:p14="http://schemas.microsoft.com/office/powerpoint/2010/main" val="3027494782"/>
+      </p:ext>
+    </p:extLst>
+  </p:cSld>
+  <p:clrMapOvr>
+    <a:masterClrMapping/>
+  </p:clrMapOvr>
+</p:sld>
+</file>
+
+<file path=ppt/slides/slide21.xml><?xml version="1.0" encoding="utf-8"?>
+<p:sld xmlns:a="http://schemas.openxmlformats.org/drawingml/2006/main" xmlns:r="http://schemas.openxmlformats.org/officeDocument/2006/relationships" xmlns:p="http://schemas.openxmlformats.org/presentationml/2006/main">
+  <p:cSld>
+    <p:spTree>
+      <p:nvGrpSpPr>
+        <p:cNvPr id="1" name="">
+          <a:extLst>
+            <a:ext uri="{FF2B5EF4-FFF2-40B4-BE49-F238E27FC236}">
+              <a16:creationId xmlns:a16="http://schemas.microsoft.com/office/drawing/2014/main" id="{885A3007-23DC-073F-3190-A6680C1E7327}"/>
+            </a:ext>
+          </a:extLst>
+        </p:cNvPr>
+        <p:cNvGrpSpPr/>
+        <p:nvPr/>
+      </p:nvGrpSpPr>
+      <p:grpSpPr>
+        <a:xfrm>
+          <a:off x="0" y="0"/>
+          <a:ext cx="0" cy="0"/>
+          <a:chOff x="0" y="0"/>
+          <a:chExt cx="0" cy="0"/>
+        </a:xfrm>
+      </p:grpSpPr>
+      <p:sp>
+        <p:nvSpPr>
+          <p:cNvPr id="2" name="Título 1">
+            <a:extLst>
+              <a:ext uri="{FF2B5EF4-FFF2-40B4-BE49-F238E27FC236}">
+                <a16:creationId xmlns:a16="http://schemas.microsoft.com/office/drawing/2014/main" id="{1E55097F-BD0B-6A0C-C15A-463AA168110E}"/>
+              </a:ext>
+            </a:extLst>
+          </p:cNvPr>
+          <p:cNvSpPr>
+            <a:spLocks noGrp="1"/>
+          </p:cNvSpPr>
+          <p:nvPr>
+            <p:ph type="title"/>
+          </p:nvPr>
+        </p:nvSpPr>
+        <p:spPr>
+          <a:xfrm>
+            <a:off x="452147" y="308714"/>
+            <a:ext cx="10515600" cy="1325563"/>
+          </a:xfrm>
+        </p:spPr>
+        <p:txBody>
+          <a:bodyPr>
+            <a:noAutofit/>
+          </a:bodyPr>
+          <a:lstStyle/>
+          <a:p>
+            <a:r>
+              <a:rPr lang="es-MX" sz="3600" b="1" i="1" dirty="0" err="1"/>
+              <a:t>Reranking</a:t>
+            </a:r>
+            <a:r>
+              <a:rPr lang="es-MX" sz="3600" i="1" dirty="0"/>
+              <a:t>: El “reordenamiento” de los </a:t>
+            </a:r>
+            <a:r>
+              <a:rPr lang="es-MX" sz="3600" i="1" dirty="0" err="1"/>
+              <a:t>chunks</a:t>
+            </a:r>
+            <a:endParaRPr lang="es-CL" sz="3600" i="1" dirty="0"/>
+          </a:p>
+        </p:txBody>
+      </p:sp>
+      <p:pic>
+        <p:nvPicPr>
+          <p:cNvPr id="4" name="Picture 2" descr="Duoc UC - Learn Chile">
+            <a:extLst>
+              <a:ext uri="{FF2B5EF4-FFF2-40B4-BE49-F238E27FC236}">
+                <a16:creationId xmlns:a16="http://schemas.microsoft.com/office/drawing/2014/main" id="{0E38341C-3ABF-7AA0-41ED-5EE4F3334757}"/>
+              </a:ext>
+            </a:extLst>
+          </p:cNvPr>
+          <p:cNvPicPr>
+            <a:picLocks noChangeAspect="1" noChangeArrowheads="1"/>
+          </p:cNvPicPr>
+          <p:nvPr/>
+        </p:nvPicPr>
+        <p:blipFill>
+          <a:blip r:embed="rId3">
+            <a:extLst>
+              <a:ext uri="{28A0092B-C50C-407E-A947-70E740481C1C}">
+                <a14:useLocalDpi xmlns:a14="http://schemas.microsoft.com/office/drawing/2010/main" val="0"/>
+              </a:ext>
+            </a:extLst>
+          </a:blip>
+          <a:srcRect/>
+          <a:stretch>
+            <a:fillRect/>
+          </a:stretch>
+        </p:blipFill>
+        <p:spPr bwMode="auto">
+          <a:xfrm>
+            <a:off x="11135913" y="30480"/>
+            <a:ext cx="974807" cy="825402"/>
+          </a:xfrm>
+          <a:prstGeom prst="rect">
+            <a:avLst/>
+          </a:prstGeom>
+          <a:noFill/>
+          <a:extLst>
+            <a:ext uri="{909E8E84-426E-40DD-AFC4-6F175D3DCCD1}">
+              <a14:hiddenFill xmlns:a14="http://schemas.microsoft.com/office/drawing/2010/main">
+                <a:solidFill>
+                  <a:srgbClr val="FFFFFF"/>
+                </a:solidFill>
+              </a14:hiddenFill>
+            </a:ext>
+          </a:extLst>
+        </p:spPr>
+      </p:pic>
+      <p:pic>
+        <p:nvPicPr>
+          <p:cNvPr id="6" name="Imagen 5">
+            <a:extLst>
+              <a:ext uri="{FF2B5EF4-FFF2-40B4-BE49-F238E27FC236}">
+                <a16:creationId xmlns:a16="http://schemas.microsoft.com/office/drawing/2014/main" id="{9A77FE7D-CFB0-D898-80F5-36EE1FAD53F3}"/>
+              </a:ext>
+            </a:extLst>
+          </p:cNvPr>
+          <p:cNvPicPr>
+            <a:picLocks noChangeAspect="1"/>
+          </p:cNvPicPr>
+          <p:nvPr/>
+        </p:nvPicPr>
+        <p:blipFill>
+          <a:blip r:embed="rId4"/>
+          <a:stretch>
+            <a:fillRect/>
+          </a:stretch>
+        </p:blipFill>
+        <p:spPr>
+          <a:xfrm>
+            <a:off x="378372" y="1843508"/>
+            <a:ext cx="6285187" cy="3418104"/>
+          </a:xfrm>
+          <a:prstGeom prst="rect">
+            <a:avLst/>
+          </a:prstGeom>
+        </p:spPr>
+      </p:pic>
+      <p:sp>
+        <p:nvSpPr>
+          <p:cNvPr id="7" name="CuadroTexto 6">
+            <a:extLst>
+              <a:ext uri="{FF2B5EF4-FFF2-40B4-BE49-F238E27FC236}">
+                <a16:creationId xmlns:a16="http://schemas.microsoft.com/office/drawing/2014/main" id="{E6BBA59E-BFC1-E977-81EF-2FDFD46B7DA1}"/>
+              </a:ext>
+            </a:extLst>
+          </p:cNvPr>
+          <p:cNvSpPr txBox="1"/>
+          <p:nvPr/>
+        </p:nvSpPr>
+        <p:spPr>
+          <a:xfrm>
+            <a:off x="378372" y="6228967"/>
+            <a:ext cx="6097712" cy="338554"/>
+          </a:xfrm>
+          <a:prstGeom prst="rect">
+            <a:avLst/>
+          </a:prstGeom>
+          <a:noFill/>
+        </p:spPr>
+        <p:txBody>
+          <a:bodyPr wrap="square">
+            <a:spAutoFit/>
+          </a:bodyPr>
+          <a:lstStyle/>
+          <a:p>
+            <a:r>
+              <a:rPr lang="es-MX" sz="1600" b="1" i="1" dirty="0"/>
+              <a:t>N</a:t>
+            </a:r>
+            <a:r>
+              <a:rPr lang="es-CL" sz="1600" b="1" i="1" dirty="0" err="1"/>
+              <a:t>ota</a:t>
+            </a:r>
+            <a:r>
+              <a:rPr lang="es-CL" sz="1600" i="1" dirty="0"/>
+              <a:t>: </a:t>
+            </a:r>
+            <a:r>
+              <a:rPr lang="es-CL" sz="1600" i="1" dirty="0" err="1">
+                <a:hlinkClick r:id="rId5">
+                  <a:extLst>
+                    <a:ext uri="{A12FA001-AC4F-418D-AE19-62706E023703}">
+                      <ahyp:hlinkClr xmlns:ahyp="http://schemas.microsoft.com/office/drawing/2018/hyperlinkcolor" val="tx"/>
+                    </a:ext>
+                  </a:extLst>
+                </a:hlinkClick>
+              </a:rPr>
+              <a:t>Hands-On</a:t>
+            </a:r>
+            <a:r>
+              <a:rPr lang="es-CL" sz="1600" i="1" dirty="0">
+                <a:hlinkClick r:id="rId5">
+                  <a:extLst>
+                    <a:ext uri="{A12FA001-AC4F-418D-AE19-62706E023703}">
+                      <ahyp:hlinkClr xmlns:ahyp="http://schemas.microsoft.com/office/drawing/2018/hyperlinkcolor" val="tx"/>
+                    </a:ext>
+                  </a:extLst>
+                </a:hlinkClick>
+              </a:rPr>
+              <a:t> </a:t>
+            </a:r>
+            <a:r>
+              <a:rPr lang="es-CL" sz="1600" i="1" dirty="0" err="1">
+                <a:hlinkClick r:id="rId5">
+                  <a:extLst>
+                    <a:ext uri="{A12FA001-AC4F-418D-AE19-62706E023703}">
+                      <ahyp:hlinkClr xmlns:ahyp="http://schemas.microsoft.com/office/drawing/2018/hyperlinkcolor" val="tx"/>
+                    </a:ext>
+                  </a:extLst>
+                </a:hlinkClick>
+              </a:rPr>
+              <a:t>Large</a:t>
+            </a:r>
+            <a:r>
+              <a:rPr lang="es-CL" sz="1600" i="1" dirty="0">
+                <a:hlinkClick r:id="rId5">
+                  <a:extLst>
+                    <a:ext uri="{A12FA001-AC4F-418D-AE19-62706E023703}">
+                      <ahyp:hlinkClr xmlns:ahyp="http://schemas.microsoft.com/office/drawing/2018/hyperlinkcolor" val="tx"/>
+                    </a:ext>
+                  </a:extLst>
+                </a:hlinkClick>
+              </a:rPr>
+              <a:t> </a:t>
+            </a:r>
+            <a:r>
+              <a:rPr lang="es-CL" sz="1600" i="1" dirty="0" err="1">
+                <a:hlinkClick r:id="rId5">
+                  <a:extLst>
+                    <a:ext uri="{A12FA001-AC4F-418D-AE19-62706E023703}">
+                      <ahyp:hlinkClr xmlns:ahyp="http://schemas.microsoft.com/office/drawing/2018/hyperlinkcolor" val="tx"/>
+                    </a:ext>
+                  </a:extLst>
+                </a:hlinkClick>
+              </a:rPr>
+              <a:t>Language</a:t>
+            </a:r>
+            <a:r>
+              <a:rPr lang="es-CL" sz="1600" i="1" dirty="0">
+                <a:hlinkClick r:id="rId5">
+                  <a:extLst>
+                    <a:ext uri="{A12FA001-AC4F-418D-AE19-62706E023703}">
+                      <ahyp:hlinkClr xmlns:ahyp="http://schemas.microsoft.com/office/drawing/2018/hyperlinkcolor" val="tx"/>
+                    </a:ext>
+                  </a:extLst>
+                </a:hlinkClick>
+              </a:rPr>
+              <a:t> </a:t>
+            </a:r>
+            <a:r>
+              <a:rPr lang="es-CL" sz="1600" i="1" dirty="0" err="1">
+                <a:hlinkClick r:id="rId5">
+                  <a:extLst>
+                    <a:ext uri="{A12FA001-AC4F-418D-AE19-62706E023703}">
+                      <ahyp:hlinkClr xmlns:ahyp="http://schemas.microsoft.com/office/drawing/2018/hyperlinkcolor" val="tx"/>
+                    </a:ext>
+                  </a:extLst>
+                </a:hlinkClick>
+              </a:rPr>
+              <a:t>Models</a:t>
+            </a:r>
+            <a:endParaRPr lang="es-CL" sz="1600" i="1" dirty="0"/>
+          </a:p>
+        </p:txBody>
+      </p:sp>
+      <p:pic>
+        <p:nvPicPr>
+          <p:cNvPr id="9" name="Imagen 8">
+            <a:extLst>
+              <a:ext uri="{FF2B5EF4-FFF2-40B4-BE49-F238E27FC236}">
+                <a16:creationId xmlns:a16="http://schemas.microsoft.com/office/drawing/2014/main" id="{373D58BE-CC1E-D8F7-D38E-93E1A66A4DD5}"/>
+              </a:ext>
+            </a:extLst>
+          </p:cNvPr>
+          <p:cNvPicPr>
+            <a:picLocks noChangeAspect="1"/>
+          </p:cNvPicPr>
+          <p:nvPr/>
+        </p:nvPicPr>
+        <p:blipFill>
+          <a:blip r:embed="rId6"/>
+          <a:stretch>
+            <a:fillRect/>
+          </a:stretch>
+        </p:blipFill>
+        <p:spPr>
+          <a:xfrm>
+            <a:off x="6476084" y="2245603"/>
+            <a:ext cx="4990702" cy="2613915"/>
+          </a:xfrm>
+          <a:prstGeom prst="rect">
+            <a:avLst/>
+          </a:prstGeom>
+        </p:spPr>
+      </p:pic>
+      <p:sp>
+        <p:nvSpPr>
+          <p:cNvPr id="11" name="CuadroTexto 10">
+            <a:extLst>
+              <a:ext uri="{FF2B5EF4-FFF2-40B4-BE49-F238E27FC236}">
+                <a16:creationId xmlns:a16="http://schemas.microsoft.com/office/drawing/2014/main" id="{9CDF4044-3062-D37C-9A08-C1A1D264E80C}"/>
+              </a:ext>
+            </a:extLst>
+          </p:cNvPr>
+          <p:cNvSpPr txBox="1"/>
+          <p:nvPr/>
+        </p:nvSpPr>
+        <p:spPr>
+          <a:xfrm>
+            <a:off x="2228192" y="5340541"/>
+            <a:ext cx="7956331" cy="646331"/>
+          </a:xfrm>
+          <a:prstGeom prst="rect">
+            <a:avLst/>
+          </a:prstGeom>
+          <a:noFill/>
+        </p:spPr>
+        <p:txBody>
+          <a:bodyPr wrap="square">
+            <a:spAutoFit/>
+          </a:bodyPr>
+          <a:lstStyle/>
+          <a:p>
+            <a:pPr algn="ctr">
+              <a:buNone/>
+            </a:pPr>
+            <a:r>
+              <a:rPr lang="es-MX" i="1" dirty="0"/>
+              <a:t>La consulta es presentada a un modelo de LLM simultáneamente con los otros documentos, asignado un score de relevancia por cada fragmento.</a:t>
+            </a:r>
+            <a:endParaRPr lang="es-MX" b="1" i="1" dirty="0"/>
+          </a:p>
+        </p:txBody>
+      </p:sp>
+    </p:spTree>
+    <p:extLst>
+      <p:ext uri="{BB962C8B-B14F-4D97-AF65-F5344CB8AC3E}">
+        <p14:creationId xmlns:p14="http://schemas.microsoft.com/office/powerpoint/2010/main" val="827955527"/>
+      </p:ext>
+    </p:extLst>
+  </p:cSld>
+  <p:clrMapOvr>
+    <a:masterClrMapping/>
+  </p:clrMapOvr>
+</p:sld>
+</file>
+
+<file path=ppt/slides/slide22.xml><?xml version="1.0" encoding="utf-8"?>
+<p:sld xmlns:a="http://schemas.openxmlformats.org/drawingml/2006/main" xmlns:r="http://schemas.openxmlformats.org/officeDocument/2006/relationships" xmlns:p="http://schemas.openxmlformats.org/presentationml/2006/main">
+  <p:cSld>
+    <p:spTree>
+      <p:nvGrpSpPr>
+        <p:cNvPr id="1" name="">
+          <a:extLst>
+            <a:ext uri="{FF2B5EF4-FFF2-40B4-BE49-F238E27FC236}">
+              <a16:creationId xmlns:a16="http://schemas.microsoft.com/office/drawing/2014/main" id="{90D6ED9D-D295-DF21-38E8-EA90D0901714}"/>
+            </a:ext>
+          </a:extLst>
+        </p:cNvPr>
+        <p:cNvGrpSpPr/>
+        <p:nvPr/>
+      </p:nvGrpSpPr>
+      <p:grpSpPr>
+        <a:xfrm>
+          <a:off x="0" y="0"/>
+          <a:ext cx="0" cy="0"/>
+          <a:chOff x="0" y="0"/>
+          <a:chExt cx="0" cy="0"/>
+        </a:xfrm>
+      </p:grpSpPr>
+      <p:sp>
+        <p:nvSpPr>
+          <p:cNvPr id="2" name="Título 1">
+            <a:extLst>
+              <a:ext uri="{FF2B5EF4-FFF2-40B4-BE49-F238E27FC236}">
+                <a16:creationId xmlns:a16="http://schemas.microsoft.com/office/drawing/2014/main" id="{F50AD6F2-832B-7510-C195-AF50A20C7385}"/>
+              </a:ext>
+            </a:extLst>
+          </p:cNvPr>
+          <p:cNvSpPr>
+            <a:spLocks noGrp="1"/>
+          </p:cNvSpPr>
+          <p:nvPr>
+            <p:ph type="title"/>
+          </p:nvPr>
+        </p:nvSpPr>
+        <p:spPr>
+          <a:xfrm>
+            <a:off x="452147" y="308714"/>
+            <a:ext cx="10515600" cy="1325563"/>
+          </a:xfrm>
+        </p:spPr>
+        <p:txBody>
+          <a:bodyPr>
+            <a:noAutofit/>
+          </a:bodyPr>
+          <a:lstStyle/>
+          <a:p>
+            <a:r>
+              <a:rPr lang="es-MX" sz="3600" b="1" i="1" dirty="0"/>
+              <a:t>¿</a:t>
+            </a:r>
+            <a:r>
+              <a:rPr lang="es-MX" sz="3600" b="1" i="1" dirty="0" err="1"/>
+              <a:t>How</a:t>
+            </a:r>
+            <a:r>
+              <a:rPr lang="es-MX" sz="3600" b="1" i="1" dirty="0"/>
+              <a:t> </a:t>
+            </a:r>
+            <a:r>
+              <a:rPr lang="es-MX" sz="3600" b="1" i="1" dirty="0" err="1"/>
+              <a:t>it</a:t>
+            </a:r>
+            <a:r>
+              <a:rPr lang="es-MX" sz="3600" b="1" i="1" dirty="0"/>
+              <a:t> Works?</a:t>
+            </a:r>
+            <a:r>
+              <a:rPr lang="es-MX" sz="3600" i="1" dirty="0"/>
+              <a:t>: Documentos y consulta.</a:t>
+            </a:r>
+            <a:endParaRPr lang="es-CL" sz="3600" i="1" dirty="0"/>
+          </a:p>
+        </p:txBody>
+      </p:sp>
+      <p:pic>
+        <p:nvPicPr>
+          <p:cNvPr id="4" name="Picture 2" descr="Duoc UC - Learn Chile">
+            <a:extLst>
+              <a:ext uri="{FF2B5EF4-FFF2-40B4-BE49-F238E27FC236}">
+                <a16:creationId xmlns:a16="http://schemas.microsoft.com/office/drawing/2014/main" id="{FDB8E315-7BA0-F57F-C12B-4ABDF7BE864A}"/>
+              </a:ext>
+            </a:extLst>
+          </p:cNvPr>
+          <p:cNvPicPr>
+            <a:picLocks noChangeAspect="1" noChangeArrowheads="1"/>
+          </p:cNvPicPr>
+          <p:nvPr/>
+        </p:nvPicPr>
+        <p:blipFill>
+          <a:blip r:embed="rId3">
+            <a:extLst>
+              <a:ext uri="{28A0092B-C50C-407E-A947-70E740481C1C}">
+                <a14:useLocalDpi xmlns:a14="http://schemas.microsoft.com/office/drawing/2010/main" val="0"/>
+              </a:ext>
+            </a:extLst>
+          </a:blip>
+          <a:srcRect/>
+          <a:stretch>
+            <a:fillRect/>
+          </a:stretch>
+        </p:blipFill>
+        <p:spPr bwMode="auto">
+          <a:xfrm>
+            <a:off x="11135913" y="30480"/>
+            <a:ext cx="974807" cy="825402"/>
+          </a:xfrm>
+          <a:prstGeom prst="rect">
+            <a:avLst/>
+          </a:prstGeom>
+          <a:noFill/>
+          <a:extLst>
+            <a:ext uri="{909E8E84-426E-40DD-AFC4-6F175D3DCCD1}">
+              <a14:hiddenFill xmlns:a14="http://schemas.microsoft.com/office/drawing/2010/main">
+                <a:solidFill>
+                  <a:srgbClr val="FFFFFF"/>
+                </a:solidFill>
+              </a14:hiddenFill>
+            </a:ext>
+          </a:extLst>
+        </p:spPr>
+      </p:pic>
+      <p:sp>
+        <p:nvSpPr>
+          <p:cNvPr id="7" name="CuadroTexto 6">
+            <a:extLst>
+              <a:ext uri="{FF2B5EF4-FFF2-40B4-BE49-F238E27FC236}">
+                <a16:creationId xmlns:a16="http://schemas.microsoft.com/office/drawing/2014/main" id="{35D41CCD-C53D-7C63-6B33-F602A3E9B016}"/>
+              </a:ext>
+            </a:extLst>
+          </p:cNvPr>
+          <p:cNvSpPr txBox="1"/>
+          <p:nvPr/>
+        </p:nvSpPr>
+        <p:spPr>
+          <a:xfrm>
+            <a:off x="378372" y="6228967"/>
+            <a:ext cx="6097712" cy="338554"/>
+          </a:xfrm>
+          <a:prstGeom prst="rect">
+            <a:avLst/>
+          </a:prstGeom>
+          <a:noFill/>
+        </p:spPr>
+        <p:txBody>
+          <a:bodyPr wrap="square">
+            <a:spAutoFit/>
+          </a:bodyPr>
+          <a:lstStyle/>
+          <a:p>
+            <a:r>
+              <a:rPr lang="es-MX" sz="1600" b="1" i="1" dirty="0"/>
+              <a:t>N</a:t>
+            </a:r>
+            <a:r>
+              <a:rPr lang="es-CL" sz="1600" b="1" i="1" dirty="0" err="1"/>
+              <a:t>ota</a:t>
+            </a:r>
+            <a:r>
+              <a:rPr lang="es-CL" sz="1600" i="1" dirty="0"/>
+              <a:t>: </a:t>
+            </a:r>
+            <a:r>
+              <a:rPr lang="es-CL" sz="1600" i="1" dirty="0" err="1">
+                <a:hlinkClick r:id="rId4">
+                  <a:extLst>
+                    <a:ext uri="{A12FA001-AC4F-418D-AE19-62706E023703}">
+                      <ahyp:hlinkClr xmlns:ahyp="http://schemas.microsoft.com/office/drawing/2018/hyperlinkcolor" val="tx"/>
+                    </a:ext>
+                  </a:extLst>
+                </a:hlinkClick>
+              </a:rPr>
+              <a:t>Hands-On</a:t>
+            </a:r>
+            <a:r>
+              <a:rPr lang="es-CL" sz="1600" i="1" dirty="0">
+                <a:hlinkClick r:id="rId4">
+                  <a:extLst>
+                    <a:ext uri="{A12FA001-AC4F-418D-AE19-62706E023703}">
+                      <ahyp:hlinkClr xmlns:ahyp="http://schemas.microsoft.com/office/drawing/2018/hyperlinkcolor" val="tx"/>
+                    </a:ext>
+                  </a:extLst>
+                </a:hlinkClick>
+              </a:rPr>
+              <a:t> </a:t>
+            </a:r>
+            <a:r>
+              <a:rPr lang="es-CL" sz="1600" i="1" dirty="0" err="1">
+                <a:hlinkClick r:id="rId4">
+                  <a:extLst>
+                    <a:ext uri="{A12FA001-AC4F-418D-AE19-62706E023703}">
+                      <ahyp:hlinkClr xmlns:ahyp="http://schemas.microsoft.com/office/drawing/2018/hyperlinkcolor" val="tx"/>
+                    </a:ext>
+                  </a:extLst>
+                </a:hlinkClick>
+              </a:rPr>
+              <a:t>Large</a:t>
+            </a:r>
+            <a:r>
+              <a:rPr lang="es-CL" sz="1600" i="1" dirty="0">
+                <a:hlinkClick r:id="rId4">
+                  <a:extLst>
+                    <a:ext uri="{A12FA001-AC4F-418D-AE19-62706E023703}">
+                      <ahyp:hlinkClr xmlns:ahyp="http://schemas.microsoft.com/office/drawing/2018/hyperlinkcolor" val="tx"/>
+                    </a:ext>
+                  </a:extLst>
+                </a:hlinkClick>
+              </a:rPr>
+              <a:t> </a:t>
+            </a:r>
+            <a:r>
+              <a:rPr lang="es-CL" sz="1600" i="1" dirty="0" err="1">
+                <a:hlinkClick r:id="rId4">
+                  <a:extLst>
+                    <a:ext uri="{A12FA001-AC4F-418D-AE19-62706E023703}">
+                      <ahyp:hlinkClr xmlns:ahyp="http://schemas.microsoft.com/office/drawing/2018/hyperlinkcolor" val="tx"/>
+                    </a:ext>
+                  </a:extLst>
+                </a:hlinkClick>
+              </a:rPr>
+              <a:t>Language</a:t>
+            </a:r>
+            <a:r>
+              <a:rPr lang="es-CL" sz="1600" i="1" dirty="0">
+                <a:hlinkClick r:id="rId4">
+                  <a:extLst>
+                    <a:ext uri="{A12FA001-AC4F-418D-AE19-62706E023703}">
+                      <ahyp:hlinkClr xmlns:ahyp="http://schemas.microsoft.com/office/drawing/2018/hyperlinkcolor" val="tx"/>
+                    </a:ext>
+                  </a:extLst>
+                </a:hlinkClick>
+              </a:rPr>
+              <a:t> </a:t>
+            </a:r>
+            <a:r>
+              <a:rPr lang="es-CL" sz="1600" i="1" dirty="0" err="1">
+                <a:hlinkClick r:id="rId4">
+                  <a:extLst>
+                    <a:ext uri="{A12FA001-AC4F-418D-AE19-62706E023703}">
+                      <ahyp:hlinkClr xmlns:ahyp="http://schemas.microsoft.com/office/drawing/2018/hyperlinkcolor" val="tx"/>
+                    </a:ext>
+                  </a:extLst>
+                </a:hlinkClick>
+              </a:rPr>
+              <a:t>Models</a:t>
+            </a:r>
+            <a:endParaRPr lang="es-CL" sz="1600" i="1" dirty="0"/>
+          </a:p>
+        </p:txBody>
+      </p:sp>
+      <p:pic>
+        <p:nvPicPr>
+          <p:cNvPr id="15" name="Imagen 14">
+            <a:extLst>
+              <a:ext uri="{FF2B5EF4-FFF2-40B4-BE49-F238E27FC236}">
+                <a16:creationId xmlns:a16="http://schemas.microsoft.com/office/drawing/2014/main" id="{F679583F-2CD4-FF48-704B-EE86CE50C794}"/>
+              </a:ext>
+            </a:extLst>
+          </p:cNvPr>
+          <p:cNvPicPr>
+            <a:picLocks noChangeAspect="1"/>
+          </p:cNvPicPr>
+          <p:nvPr/>
+        </p:nvPicPr>
+        <p:blipFill>
+          <a:blip r:embed="rId5"/>
+          <a:stretch>
+            <a:fillRect/>
+          </a:stretch>
+        </p:blipFill>
+        <p:spPr>
+          <a:xfrm>
+            <a:off x="574578" y="1414196"/>
+            <a:ext cx="6439311" cy="4334961"/>
+          </a:xfrm>
+          <a:prstGeom prst="rect">
+            <a:avLst/>
+          </a:prstGeom>
+        </p:spPr>
+      </p:pic>
+      <p:pic>
+        <p:nvPicPr>
+          <p:cNvPr id="17" name="Imagen 16">
+            <a:extLst>
+              <a:ext uri="{FF2B5EF4-FFF2-40B4-BE49-F238E27FC236}">
+                <a16:creationId xmlns:a16="http://schemas.microsoft.com/office/drawing/2014/main" id="{498BD631-9ADF-9D75-9D2A-B6CB53E3C40C}"/>
+              </a:ext>
+            </a:extLst>
+          </p:cNvPr>
+          <p:cNvPicPr>
+            <a:picLocks noChangeAspect="1"/>
+          </p:cNvPicPr>
+          <p:nvPr/>
+        </p:nvPicPr>
+        <p:blipFill>
+          <a:blip r:embed="rId6"/>
+          <a:stretch>
+            <a:fillRect/>
+          </a:stretch>
+        </p:blipFill>
+        <p:spPr>
+          <a:xfrm>
+            <a:off x="7136320" y="3257851"/>
+            <a:ext cx="4794536" cy="647649"/>
+          </a:xfrm>
+          <a:prstGeom prst="rect">
+            <a:avLst/>
+          </a:prstGeom>
+        </p:spPr>
+      </p:pic>
+      <p:sp>
+        <p:nvSpPr>
+          <p:cNvPr id="18" name="CuadroTexto 17">
+            <a:extLst>
+              <a:ext uri="{FF2B5EF4-FFF2-40B4-BE49-F238E27FC236}">
+                <a16:creationId xmlns:a16="http://schemas.microsoft.com/office/drawing/2014/main" id="{0FD09BA7-9E89-9DC7-0150-7F8BE07679E7}"/>
+              </a:ext>
+            </a:extLst>
+          </p:cNvPr>
+          <p:cNvSpPr txBox="1"/>
+          <p:nvPr/>
+        </p:nvSpPr>
+        <p:spPr>
+          <a:xfrm>
+            <a:off x="7381493" y="4343630"/>
+            <a:ext cx="4304190" cy="923330"/>
+          </a:xfrm>
+          <a:prstGeom prst="rect">
+            <a:avLst/>
+          </a:prstGeom>
+          <a:noFill/>
+        </p:spPr>
+        <p:txBody>
+          <a:bodyPr wrap="square">
+            <a:spAutoFit/>
+          </a:bodyPr>
+          <a:lstStyle/>
+          <a:p>
+            <a:pPr algn="ctr">
+              <a:buNone/>
+            </a:pPr>
+            <a:r>
+              <a:rPr lang="es-MX" i="1" dirty="0"/>
+              <a:t>Una consulta, un conjunto de documentos y un score de relevancia para los </a:t>
+            </a:r>
+            <a:r>
+              <a:rPr lang="es-MX" i="1" dirty="0" err="1"/>
+              <a:t>chunks</a:t>
+            </a:r>
+            <a:endParaRPr lang="es-MX" i="1" dirty="0"/>
+          </a:p>
+          <a:p>
+            <a:pPr algn="ctr">
+              <a:buNone/>
+            </a:pPr>
+            <a:r>
+              <a:rPr lang="es-MX" i="1" dirty="0"/>
+              <a:t>.</a:t>
+            </a:r>
+            <a:endParaRPr lang="es-MX" b="1" i="1" dirty="0"/>
+          </a:p>
+        </p:txBody>
+      </p:sp>
+    </p:spTree>
+    <p:extLst>
+      <p:ext uri="{BB962C8B-B14F-4D97-AF65-F5344CB8AC3E}">
+        <p14:creationId xmlns:p14="http://schemas.microsoft.com/office/powerpoint/2010/main" val="1634233162"/>
+      </p:ext>
+    </p:extLst>
+  </p:cSld>
+  <p:clrMapOvr>
+    <a:masterClrMapping/>
+  </p:clrMapOvr>
+</p:sld>
+</file>
+
+<file path=ppt/slides/slide23.xml><?xml version="1.0" encoding="utf-8"?>
+<p:sld xmlns:a="http://schemas.openxmlformats.org/drawingml/2006/main" xmlns:r="http://schemas.openxmlformats.org/officeDocument/2006/relationships" xmlns:p="http://schemas.openxmlformats.org/presentationml/2006/main">
+  <p:cSld>
+    <p:spTree>
+      <p:nvGrpSpPr>
+        <p:cNvPr id="1" name="">
+          <a:extLst>
+            <a:ext uri="{FF2B5EF4-FFF2-40B4-BE49-F238E27FC236}">
+              <a16:creationId xmlns:a16="http://schemas.microsoft.com/office/drawing/2014/main" id="{3E5AFBE8-0785-FC4B-BBAE-4705C18D4ABC}"/>
+            </a:ext>
+          </a:extLst>
+        </p:cNvPr>
+        <p:cNvGrpSpPr/>
+        <p:nvPr/>
+      </p:nvGrpSpPr>
+      <p:grpSpPr>
+        <a:xfrm>
+          <a:off x="0" y="0"/>
+          <a:ext cx="0" cy="0"/>
+          <a:chOff x="0" y="0"/>
+          <a:chExt cx="0" cy="0"/>
+        </a:xfrm>
+      </p:grpSpPr>
+      <p:sp>
+        <p:nvSpPr>
+          <p:cNvPr id="2" name="Título 1">
+            <a:extLst>
+              <a:ext uri="{FF2B5EF4-FFF2-40B4-BE49-F238E27FC236}">
+                <a16:creationId xmlns:a16="http://schemas.microsoft.com/office/drawing/2014/main" id="{397CB4C4-9DED-7938-B2B0-CBF05E60408A}"/>
+              </a:ext>
+            </a:extLst>
+          </p:cNvPr>
+          <p:cNvSpPr>
+            <a:spLocks noGrp="1"/>
+          </p:cNvSpPr>
+          <p:nvPr>
+            <p:ph type="title"/>
+          </p:nvPr>
+        </p:nvSpPr>
+        <p:spPr>
+          <a:xfrm>
+            <a:off x="452147" y="308714"/>
+            <a:ext cx="10515600" cy="1325563"/>
+          </a:xfrm>
+        </p:spPr>
+        <p:txBody>
+          <a:bodyPr>
+            <a:noAutofit/>
+          </a:bodyPr>
+          <a:lstStyle/>
+          <a:p>
+            <a:r>
+              <a:rPr lang="es-MX" sz="3600" b="1" i="1" dirty="0" err="1"/>
+              <a:t>Reranking</a:t>
+            </a:r>
+            <a:r>
+              <a:rPr lang="es-MX" sz="3600" i="1" dirty="0"/>
+              <a:t>:  La industria a popularizado empresas especializadas en modelos de </a:t>
+            </a:r>
+            <a:r>
+              <a:rPr lang="es-MX" sz="3600" i="1" dirty="0" err="1"/>
+              <a:t>reranking</a:t>
+            </a:r>
+            <a:r>
+              <a:rPr lang="es-MX" sz="3600" i="1" dirty="0"/>
+              <a:t>.</a:t>
+            </a:r>
+            <a:endParaRPr lang="es-CL" sz="3600" i="1" dirty="0"/>
+          </a:p>
+        </p:txBody>
+      </p:sp>
+      <p:pic>
+        <p:nvPicPr>
+          <p:cNvPr id="4" name="Picture 2" descr="Duoc UC - Learn Chile">
+            <a:extLst>
+              <a:ext uri="{FF2B5EF4-FFF2-40B4-BE49-F238E27FC236}">
+                <a16:creationId xmlns:a16="http://schemas.microsoft.com/office/drawing/2014/main" id="{4BBACF34-BD7A-97F0-B264-296DE4E8CF85}"/>
+              </a:ext>
+            </a:extLst>
+          </p:cNvPr>
+          <p:cNvPicPr>
+            <a:picLocks noChangeAspect="1" noChangeArrowheads="1"/>
+          </p:cNvPicPr>
+          <p:nvPr/>
+        </p:nvPicPr>
+        <p:blipFill>
+          <a:blip r:embed="rId3">
+            <a:extLst>
+              <a:ext uri="{28A0092B-C50C-407E-A947-70E740481C1C}">
+                <a14:useLocalDpi xmlns:a14="http://schemas.microsoft.com/office/drawing/2010/main" val="0"/>
+              </a:ext>
+            </a:extLst>
+          </a:blip>
+          <a:srcRect/>
+          <a:stretch>
+            <a:fillRect/>
+          </a:stretch>
+        </p:blipFill>
+        <p:spPr bwMode="auto">
+          <a:xfrm>
+            <a:off x="11135913" y="30480"/>
+            <a:ext cx="974807" cy="825402"/>
+          </a:xfrm>
+          <a:prstGeom prst="rect">
+            <a:avLst/>
+          </a:prstGeom>
+          <a:noFill/>
+          <a:extLst>
+            <a:ext uri="{909E8E84-426E-40DD-AFC4-6F175D3DCCD1}">
+              <a14:hiddenFill xmlns:a14="http://schemas.microsoft.com/office/drawing/2010/main">
+                <a:solidFill>
+                  <a:srgbClr val="FFFFFF"/>
+                </a:solidFill>
+              </a14:hiddenFill>
+            </a:ext>
+          </a:extLst>
+        </p:spPr>
+      </p:pic>
+      <p:pic>
+        <p:nvPicPr>
+          <p:cNvPr id="3074" name="Picture 2" descr="Cohere — Wikipédia">
+            <a:extLst>
+              <a:ext uri="{FF2B5EF4-FFF2-40B4-BE49-F238E27FC236}">
+                <a16:creationId xmlns:a16="http://schemas.microsoft.com/office/drawing/2014/main" id="{4E0FE783-BC14-3A4E-4215-392B147DED1E}"/>
+              </a:ext>
+            </a:extLst>
+          </p:cNvPr>
+          <p:cNvPicPr>
+            <a:picLocks noChangeAspect="1" noChangeArrowheads="1"/>
+          </p:cNvPicPr>
+          <p:nvPr/>
+        </p:nvPicPr>
+        <p:blipFill>
+          <a:blip r:embed="rId4">
+            <a:extLst>
+              <a:ext uri="{28A0092B-C50C-407E-A947-70E740481C1C}">
+                <a14:useLocalDpi xmlns:a14="http://schemas.microsoft.com/office/drawing/2010/main" val="0"/>
+              </a:ext>
+            </a:extLst>
+          </a:blip>
+          <a:srcRect/>
+          <a:stretch>
+            <a:fillRect/>
+          </a:stretch>
+        </p:blipFill>
+        <p:spPr bwMode="auto">
+          <a:xfrm>
+            <a:off x="1415346" y="1897199"/>
+            <a:ext cx="3578381" cy="2007969"/>
+          </a:xfrm>
+          <a:prstGeom prst="rect">
+            <a:avLst/>
+          </a:prstGeom>
+          <a:noFill/>
+          <a:extLst>
+            <a:ext uri="{909E8E84-426E-40DD-AFC4-6F175D3DCCD1}">
+              <a14:hiddenFill xmlns:a14="http://schemas.microsoft.com/office/drawing/2010/main">
+                <a:solidFill>
+                  <a:srgbClr val="FFFFFF"/>
+                </a:solidFill>
+              </a14:hiddenFill>
+            </a:ext>
+          </a:extLst>
+        </p:spPr>
+      </p:pic>
+      <p:pic>
+        <p:nvPicPr>
+          <p:cNvPr id="3076" name="Picture 4" descr="voyage-ai · GitHub">
+            <a:extLst>
+              <a:ext uri="{FF2B5EF4-FFF2-40B4-BE49-F238E27FC236}">
+                <a16:creationId xmlns:a16="http://schemas.microsoft.com/office/drawing/2014/main" id="{3DBE3B5C-A262-DFEA-6D09-893840456C00}"/>
+              </a:ext>
+            </a:extLst>
+          </p:cNvPr>
+          <p:cNvPicPr>
+            <a:picLocks noChangeAspect="1" noChangeArrowheads="1"/>
+          </p:cNvPicPr>
+          <p:nvPr/>
+        </p:nvPicPr>
+        <p:blipFill>
+          <a:blip r:embed="rId5">
+            <a:extLst>
+              <a:ext uri="{28A0092B-C50C-407E-A947-70E740481C1C}">
+                <a14:useLocalDpi xmlns:a14="http://schemas.microsoft.com/office/drawing/2010/main" val="0"/>
+              </a:ext>
+            </a:extLst>
+          </a:blip>
+          <a:srcRect/>
+          <a:stretch>
+            <a:fillRect/>
+          </a:stretch>
+        </p:blipFill>
+        <p:spPr bwMode="auto">
+          <a:xfrm>
+            <a:off x="3042947" y="3746938"/>
+            <a:ext cx="2667000" cy="2667000"/>
+          </a:xfrm>
+          <a:prstGeom prst="rect">
+            <a:avLst/>
+          </a:prstGeom>
+          <a:noFill/>
+          <a:extLst>
+            <a:ext uri="{909E8E84-426E-40DD-AFC4-6F175D3DCCD1}">
+              <a14:hiddenFill xmlns:a14="http://schemas.microsoft.com/office/drawing/2010/main">
+                <a:solidFill>
+                  <a:srgbClr val="FFFFFF"/>
+                </a:solidFill>
+              </a14:hiddenFill>
+            </a:ext>
+          </a:extLst>
+        </p:spPr>
+      </p:pic>
+      <p:pic>
+        <p:nvPicPr>
+          <p:cNvPr id="3078" name="Picture 6" descr="prithivida/flashrank · Hugging Face">
+            <a:extLst>
+              <a:ext uri="{FF2B5EF4-FFF2-40B4-BE49-F238E27FC236}">
+                <a16:creationId xmlns:a16="http://schemas.microsoft.com/office/drawing/2014/main" id="{C77F5CB2-EAFE-E3E2-9DF9-2F3AB8237380}"/>
+              </a:ext>
+            </a:extLst>
+          </p:cNvPr>
+          <p:cNvPicPr>
+            <a:picLocks noChangeAspect="1" noChangeArrowheads="1"/>
+          </p:cNvPicPr>
+          <p:nvPr/>
+        </p:nvPicPr>
+        <p:blipFill>
+          <a:blip r:embed="rId6">
+            <a:extLst>
+              <a:ext uri="{28A0092B-C50C-407E-A947-70E740481C1C}">
+                <a14:useLocalDpi xmlns:a14="http://schemas.microsoft.com/office/drawing/2010/main" val="0"/>
+              </a:ext>
+            </a:extLst>
+          </a:blip>
+          <a:srcRect/>
+          <a:stretch>
+            <a:fillRect/>
+          </a:stretch>
+        </p:blipFill>
+        <p:spPr bwMode="auto">
+          <a:xfrm>
+            <a:off x="6701267" y="3905168"/>
+            <a:ext cx="3711700" cy="2007969"/>
+          </a:xfrm>
+          <a:prstGeom prst="rect">
+            <a:avLst/>
+          </a:prstGeom>
+          <a:noFill/>
+          <a:extLst>
+            <a:ext uri="{909E8E84-426E-40DD-AFC4-6F175D3DCCD1}">
+              <a14:hiddenFill xmlns:a14="http://schemas.microsoft.com/office/drawing/2010/main">
+                <a:solidFill>
+                  <a:srgbClr val="FFFFFF"/>
+                </a:solidFill>
+              </a14:hiddenFill>
+            </a:ext>
+          </a:extLst>
+        </p:spPr>
+      </p:pic>
+      <p:pic>
+        <p:nvPicPr>
+          <p:cNvPr id="3080" name="Picture 8" descr="How to run a regression using Hugging Face — An example with financial news to predict stock returns">
+            <a:extLst>
+              <a:ext uri="{FF2B5EF4-FFF2-40B4-BE49-F238E27FC236}">
+                <a16:creationId xmlns:a16="http://schemas.microsoft.com/office/drawing/2014/main" id="{41BD7A87-8679-3D38-364B-B9AE85037672}"/>
+              </a:ext>
+            </a:extLst>
+          </p:cNvPr>
+          <p:cNvPicPr>
+            <a:picLocks noChangeAspect="1" noChangeArrowheads="1"/>
+          </p:cNvPicPr>
+          <p:nvPr/>
+        </p:nvPicPr>
+        <p:blipFill>
+          <a:blip r:embed="rId7">
+            <a:extLst>
+              <a:ext uri="{28A0092B-C50C-407E-A947-70E740481C1C}">
+                <a14:useLocalDpi xmlns:a14="http://schemas.microsoft.com/office/drawing/2010/main" val="0"/>
+              </a:ext>
+            </a:extLst>
+          </a:blip>
+          <a:srcRect/>
+          <a:stretch>
+            <a:fillRect/>
+          </a:stretch>
+        </p:blipFill>
+        <p:spPr bwMode="auto">
+          <a:xfrm>
+            <a:off x="6849469" y="1799733"/>
+            <a:ext cx="3563498" cy="1781749"/>
+          </a:xfrm>
+          <a:prstGeom prst="rect">
+            <a:avLst/>
+          </a:prstGeom>
+          <a:noFill/>
+          <a:extLst>
+            <a:ext uri="{909E8E84-426E-40DD-AFC4-6F175D3DCCD1}">
+              <a14:hiddenFill xmlns:a14="http://schemas.microsoft.com/office/drawing/2010/main">
+                <a:solidFill>
+                  <a:srgbClr val="FFFFFF"/>
+                </a:solidFill>
+              </a14:hiddenFill>
+            </a:ext>
+          </a:extLst>
+        </p:spPr>
+      </p:pic>
+    </p:spTree>
+    <p:extLst>
+      <p:ext uri="{BB962C8B-B14F-4D97-AF65-F5344CB8AC3E}">
+        <p14:creationId xmlns:p14="http://schemas.microsoft.com/office/powerpoint/2010/main" val="3463910525"/>
+      </p:ext>
+    </p:extLst>
+  </p:cSld>
+  <p:clrMapOvr>
+    <a:masterClrMapping/>
+  </p:clrMapOvr>
+</p:sld>
+</file>
+
+<file path=ppt/slides/slide24.xml><?xml version="1.0" encoding="utf-8"?>
+<p:sld xmlns:a="http://schemas.openxmlformats.org/drawingml/2006/main" xmlns:r="http://schemas.openxmlformats.org/officeDocument/2006/relationships" xmlns:p="http://schemas.openxmlformats.org/presentationml/2006/main">
+  <p:cSld>
+    <p:spTree>
+      <p:nvGrpSpPr>
+        <p:cNvPr id="1" name="">
+          <a:extLst>
+            <a:ext uri="{FF2B5EF4-FFF2-40B4-BE49-F238E27FC236}">
+              <a16:creationId xmlns:a16="http://schemas.microsoft.com/office/drawing/2014/main" id="{6E3539C1-8FAA-7F04-DF2D-6A6AF94BE4D3}"/>
+            </a:ext>
+          </a:extLst>
+        </p:cNvPr>
+        <p:cNvGrpSpPr/>
+        <p:nvPr/>
+      </p:nvGrpSpPr>
+      <p:grpSpPr>
+        <a:xfrm>
+          <a:off x="0" y="0"/>
+          <a:ext cx="0" cy="0"/>
+          <a:chOff x="0" y="0"/>
+          <a:chExt cx="0" cy="0"/>
+        </a:xfrm>
+      </p:grpSpPr>
+      <p:sp>
+        <p:nvSpPr>
+          <p:cNvPr id="2" name="Título 1">
+            <a:extLst>
+              <a:ext uri="{FF2B5EF4-FFF2-40B4-BE49-F238E27FC236}">
+                <a16:creationId xmlns:a16="http://schemas.microsoft.com/office/drawing/2014/main" id="{C742F8BA-2DB6-3DDF-44D3-6A85D1A2F5D5}"/>
+              </a:ext>
+            </a:extLst>
+          </p:cNvPr>
+          <p:cNvSpPr>
+            <a:spLocks noGrp="1"/>
+          </p:cNvSpPr>
+          <p:nvPr>
+            <p:ph type="title"/>
+          </p:nvPr>
+        </p:nvSpPr>
+        <p:spPr>
+          <a:xfrm>
+            <a:off x="4226542" y="2576704"/>
+            <a:ext cx="10515600" cy="1325563"/>
+          </a:xfrm>
+        </p:spPr>
+        <p:txBody>
+          <a:bodyPr>
+            <a:noAutofit/>
+          </a:bodyPr>
+          <a:lstStyle/>
+          <a:p>
+            <a:r>
+              <a:rPr lang="es-MX" sz="3600" i="1" dirty="0"/>
+              <a:t>¿Qué falta aquí?</a:t>
+            </a:r>
+            <a:endParaRPr lang="es-CL" sz="3600" i="1" dirty="0"/>
+          </a:p>
+        </p:txBody>
+      </p:sp>
+      <p:pic>
+        <p:nvPicPr>
+          <p:cNvPr id="4" name="Picture 2" descr="Duoc UC - Learn Chile">
+            <a:extLst>
+              <a:ext uri="{FF2B5EF4-FFF2-40B4-BE49-F238E27FC236}">
+                <a16:creationId xmlns:a16="http://schemas.microsoft.com/office/drawing/2014/main" id="{7BC56528-ED7A-AA7A-3DA6-09B6CC5E10B8}"/>
+              </a:ext>
+            </a:extLst>
+          </p:cNvPr>
+          <p:cNvPicPr>
+            <a:picLocks noChangeAspect="1" noChangeArrowheads="1"/>
+          </p:cNvPicPr>
+          <p:nvPr/>
+        </p:nvPicPr>
+        <p:blipFill>
+          <a:blip r:embed="rId3">
+            <a:extLst>
+              <a:ext uri="{28A0092B-C50C-407E-A947-70E740481C1C}">
+                <a14:useLocalDpi xmlns:a14="http://schemas.microsoft.com/office/drawing/2010/main" val="0"/>
+              </a:ext>
+            </a:extLst>
+          </a:blip>
+          <a:srcRect/>
+          <a:stretch>
+            <a:fillRect/>
+          </a:stretch>
+        </p:blipFill>
+        <p:spPr bwMode="auto">
+          <a:xfrm>
+            <a:off x="11135913" y="30480"/>
+            <a:ext cx="974807" cy="825402"/>
+          </a:xfrm>
+          <a:prstGeom prst="rect">
+            <a:avLst/>
+          </a:prstGeom>
+          <a:noFill/>
+          <a:extLst>
+            <a:ext uri="{909E8E84-426E-40DD-AFC4-6F175D3DCCD1}">
+              <a14:hiddenFill xmlns:a14="http://schemas.microsoft.com/office/drawing/2010/main">
+                <a:solidFill>
+                  <a:srgbClr val="FFFFFF"/>
+                </a:solidFill>
+              </a14:hiddenFill>
+            </a:ext>
+          </a:extLst>
+        </p:spPr>
+      </p:pic>
+    </p:spTree>
+    <p:extLst>
+      <p:ext uri="{BB962C8B-B14F-4D97-AF65-F5344CB8AC3E}">
+        <p14:creationId xmlns:p14="http://schemas.microsoft.com/office/powerpoint/2010/main" val="1652729075"/>
+      </p:ext>
+    </p:extLst>
+  </p:cSld>
+  <p:clrMapOvr>
+    <a:masterClrMapping/>
+  </p:clrMapOvr>
+</p:sld>
+</file>
+
+<file path=ppt/slides/slide25.xml><?xml version="1.0" encoding="utf-8"?>
+<p:sld xmlns:a="http://schemas.openxmlformats.org/drawingml/2006/main" xmlns:r="http://schemas.openxmlformats.org/officeDocument/2006/relationships" xmlns:p="http://schemas.openxmlformats.org/presentationml/2006/main">
+  <p:cSld>
+    <p:spTree>
+      <p:nvGrpSpPr>
+        <p:cNvPr id="1" name="">
+          <a:extLst>
+            <a:ext uri="{FF2B5EF4-FFF2-40B4-BE49-F238E27FC236}">
               <a16:creationId xmlns:a16="http://schemas.microsoft.com/office/drawing/2014/main" id="{9FFFE625-29D4-7057-108E-8CC27D419EA2}"/>
             </a:ext>
           </a:extLst>
@@ -11589,7 +13961,7 @@
 </p:sld>
 </file>
 
-<file path=ppt/slides/slide21.xml><?xml version="1.0" encoding="utf-8"?>
+<file path=ppt/slides/slide26.xml><?xml version="1.0" encoding="utf-8"?>
 <p:sld xmlns:a="http://schemas.openxmlformats.org/drawingml/2006/main" xmlns:r="http://schemas.openxmlformats.org/officeDocument/2006/relationships" xmlns:p="http://schemas.openxmlformats.org/presentationml/2006/main">
   <p:cSld>
     <p:spTree>
@@ -12570,7 +14942,7 @@
 </p:sld>
 </file>
 
-<file path=ppt/slides/slide22.xml><?xml version="1.0" encoding="utf-8"?>
+<file path=ppt/slides/slide27.xml><?xml version="1.0" encoding="utf-8"?>
 <p:sld xmlns:a="http://schemas.openxmlformats.org/drawingml/2006/main" xmlns:r="http://schemas.openxmlformats.org/officeDocument/2006/relationships" xmlns:p="http://schemas.openxmlformats.org/presentationml/2006/main">
   <p:cSld>
     <p:spTree>
@@ -12762,7 +15134,7 @@
 </p:sld>
 </file>
 
-<file path=ppt/slides/slide23.xml><?xml version="1.0" encoding="utf-8"?>
+<file path=ppt/slides/slide28.xml><?xml version="1.0" encoding="utf-8"?>
 <p:sld xmlns:a="http://schemas.openxmlformats.org/drawingml/2006/main" xmlns:r="http://schemas.openxmlformats.org/officeDocument/2006/relationships" xmlns:p="http://schemas.openxmlformats.org/presentationml/2006/main">
   <p:cSld>
     <p:spTree>
@@ -12896,7 +15268,7 @@
 </p:sld>
 </file>
 
-<file path=ppt/slides/slide24.xml><?xml version="1.0" encoding="utf-8"?>
+<file path=ppt/slides/slide29.xml><?xml version="1.0" encoding="utf-8"?>
 <p:sld xmlns:a="http://schemas.openxmlformats.org/drawingml/2006/main" xmlns:r="http://schemas.openxmlformats.org/officeDocument/2006/relationships" xmlns:p="http://schemas.openxmlformats.org/presentationml/2006/main">
   <p:cSld>
     <p:spTree>
